--- a/docs/pptx/carbo/ritu-carbo-scatter-cg.pptx
+++ b/docs/pptx/carbo/ritu-carbo-scatter-cg.pptx
@@ -3403,7 +3403,7 @@
           </p:nvSpPr>
           <p:spPr>
             <a:xfrm>
-              <a:off x="3203327" y="4491920"/>
+              <a:off x="3203331" y="4491921"/>
               <a:ext cx="49651" cy="49651"/>
             </a:xfrm>
             <a:prstGeom prst="ellipse">
@@ -4488,7 +4488,7 @@
           </p:nvSpPr>
           <p:spPr>
             <a:xfrm>
-              <a:off x="3127367" y="3951060"/>
+              <a:off x="3720383" y="4388761"/>
               <a:ext cx="49651" cy="49651"/>
             </a:xfrm>
             <a:prstGeom prst="ellipse">
@@ -4523,7 +4523,7 @@
           </p:nvSpPr>
           <p:spPr>
             <a:xfrm>
-              <a:off x="3720383" y="4388761"/>
+              <a:off x="4137710" y="4573368"/>
               <a:ext cx="49651" cy="49651"/>
             </a:xfrm>
             <a:prstGeom prst="ellipse">
@@ -4558,7 +4558,7 @@
           </p:nvSpPr>
           <p:spPr>
             <a:xfrm>
-              <a:off x="4137710" y="4573368"/>
+              <a:off x="2822388" y="4840137"/>
               <a:ext cx="49651" cy="49651"/>
             </a:xfrm>
             <a:prstGeom prst="ellipse">
@@ -4593,7 +4593,7 @@
           </p:nvSpPr>
           <p:spPr>
             <a:xfrm>
-              <a:off x="2822388" y="4840137"/>
+              <a:off x="3393448" y="3989203"/>
               <a:ext cx="49651" cy="49651"/>
             </a:xfrm>
             <a:prstGeom prst="ellipse">
@@ -4628,7 +4628,7 @@
           </p:nvSpPr>
           <p:spPr>
             <a:xfrm>
-              <a:off x="3393448" y="3989203"/>
+              <a:off x="3288144" y="4708005"/>
               <a:ext cx="49651" cy="49651"/>
             </a:xfrm>
             <a:prstGeom prst="ellipse">
@@ -4663,7 +4663,7 @@
           </p:nvSpPr>
           <p:spPr>
             <a:xfrm>
-              <a:off x="3288144" y="4708005"/>
+              <a:off x="4206352" y="4834462"/>
               <a:ext cx="49651" cy="49651"/>
             </a:xfrm>
             <a:prstGeom prst="ellipse">
@@ -4698,7 +4698,7 @@
           </p:nvSpPr>
           <p:spPr>
             <a:xfrm>
-              <a:off x="4206352" y="4834462"/>
+              <a:off x="4233809" y="4261499"/>
               <a:ext cx="49651" cy="49651"/>
             </a:xfrm>
             <a:prstGeom prst="ellipse">
@@ -4733,7 +4733,7 @@
           </p:nvSpPr>
           <p:spPr>
             <a:xfrm>
-              <a:off x="4233809" y="4261499"/>
+              <a:off x="1757196" y="5082764"/>
               <a:ext cx="49651" cy="49651"/>
             </a:xfrm>
             <a:prstGeom prst="ellipse">
@@ -4768,7 +4768,7 @@
           </p:nvSpPr>
           <p:spPr>
             <a:xfrm>
-              <a:off x="1757196" y="5082764"/>
+              <a:off x="2696880" y="4523497"/>
               <a:ext cx="49651" cy="49651"/>
             </a:xfrm>
             <a:prstGeom prst="ellipse">
@@ -4803,7 +4803,7 @@
           </p:nvSpPr>
           <p:spPr>
             <a:xfrm>
-              <a:off x="2696880" y="4523497"/>
+              <a:off x="2666208" y="4661579"/>
               <a:ext cx="49651" cy="49651"/>
             </a:xfrm>
             <a:prstGeom prst="ellipse">
@@ -4838,7 +4838,7 @@
           </p:nvSpPr>
           <p:spPr>
             <a:xfrm>
-              <a:off x="2666208" y="4661579"/>
+              <a:off x="4753904" y="4371236"/>
               <a:ext cx="49651" cy="49651"/>
             </a:xfrm>
             <a:prstGeom prst="ellipse">
@@ -4873,7 +4873,7 @@
           </p:nvSpPr>
           <p:spPr>
             <a:xfrm>
-              <a:off x="4753904" y="4371236"/>
+              <a:off x="4795090" y="4491299"/>
               <a:ext cx="49651" cy="49651"/>
             </a:xfrm>
             <a:prstGeom prst="ellipse">
@@ -4908,7 +4908,7 @@
           </p:nvSpPr>
           <p:spPr>
             <a:xfrm>
-              <a:off x="4795090" y="4491299"/>
+              <a:off x="3092602" y="4862931"/>
               <a:ext cx="49651" cy="49651"/>
             </a:xfrm>
             <a:prstGeom prst="ellipse">
@@ -4943,7 +4943,7 @@
           </p:nvSpPr>
           <p:spPr>
             <a:xfrm>
-              <a:off x="3092602" y="4862931"/>
+              <a:off x="4256704" y="3456872"/>
               <a:ext cx="49651" cy="49651"/>
             </a:xfrm>
             <a:prstGeom prst="ellipse">
@@ -4978,7 +4978,7 @@
           </p:nvSpPr>
           <p:spPr>
             <a:xfrm>
-              <a:off x="4256704" y="3456872"/>
+              <a:off x="3151748" y="4775923"/>
               <a:ext cx="49651" cy="49651"/>
             </a:xfrm>
             <a:prstGeom prst="ellipse">
@@ -5013,7 +5013,7 @@
           </p:nvSpPr>
           <p:spPr>
             <a:xfrm>
-              <a:off x="3151748" y="4775923"/>
+              <a:off x="3549043" y="4932441"/>
               <a:ext cx="49651" cy="49651"/>
             </a:xfrm>
             <a:prstGeom prst="ellipse">
@@ -5048,7 +5048,7 @@
           </p:nvSpPr>
           <p:spPr>
             <a:xfrm>
-              <a:off x="3549043" y="4932441"/>
+              <a:off x="2091117" y="4464996"/>
               <a:ext cx="49651" cy="49651"/>
             </a:xfrm>
             <a:prstGeom prst="ellipse">
@@ -5083,7 +5083,7 @@
           </p:nvSpPr>
           <p:spPr>
             <a:xfrm>
-              <a:off x="2091117" y="4464996"/>
+              <a:off x="4764715" y="4149900"/>
               <a:ext cx="49651" cy="49651"/>
             </a:xfrm>
             <a:prstGeom prst="ellipse">
@@ -5118,7 +5118,7 @@
           </p:nvSpPr>
           <p:spPr>
             <a:xfrm>
-              <a:off x="4764715" y="4149900"/>
+              <a:off x="6057674" y="4445833"/>
               <a:ext cx="49651" cy="49651"/>
             </a:xfrm>
             <a:prstGeom prst="ellipse">
@@ -5153,7 +5153,7 @@
           </p:nvSpPr>
           <p:spPr>
             <a:xfrm>
-              <a:off x="6057674" y="4445833"/>
+              <a:off x="2841366" y="4931623"/>
               <a:ext cx="49651" cy="49651"/>
             </a:xfrm>
             <a:prstGeom prst="ellipse">
@@ -5188,7 +5188,7 @@
           </p:nvSpPr>
           <p:spPr>
             <a:xfrm>
-              <a:off x="2841366" y="4931623"/>
+              <a:off x="3519383" y="4832592"/>
               <a:ext cx="49651" cy="49651"/>
             </a:xfrm>
             <a:prstGeom prst="ellipse">
@@ -5223,7 +5223,7 @@
           </p:nvSpPr>
           <p:spPr>
             <a:xfrm>
-              <a:off x="3519383" y="4832592"/>
+              <a:off x="3230976" y="4484041"/>
               <a:ext cx="49651" cy="49651"/>
             </a:xfrm>
             <a:prstGeom prst="ellipse">
@@ -5258,7 +5258,7 @@
           </p:nvSpPr>
           <p:spPr>
             <a:xfrm>
-              <a:off x="3230976" y="4484041"/>
+              <a:off x="2895073" y="5251806"/>
               <a:ext cx="49651" cy="49651"/>
             </a:xfrm>
             <a:prstGeom prst="ellipse">
@@ -5293,7 +5293,7 @@
           </p:nvSpPr>
           <p:spPr>
             <a:xfrm>
-              <a:off x="2895073" y="5251806"/>
+              <a:off x="4636613" y="4349796"/>
               <a:ext cx="49651" cy="49651"/>
             </a:xfrm>
             <a:prstGeom prst="ellipse">
@@ -5328,7 +5328,7 @@
           </p:nvSpPr>
           <p:spPr>
             <a:xfrm>
-              <a:off x="4636613" y="4349796"/>
+              <a:off x="2952240" y="5524381"/>
               <a:ext cx="49651" cy="49651"/>
             </a:xfrm>
             <a:prstGeom prst="ellipse">
@@ -5363,7 +5363,7 @@
           </p:nvSpPr>
           <p:spPr>
             <a:xfrm>
-              <a:off x="2952240" y="5524381"/>
+              <a:off x="3735151" y="4058540"/>
               <a:ext cx="49651" cy="49651"/>
             </a:xfrm>
             <a:prstGeom prst="ellipse">
@@ -5398,7 +5398,7 @@
           </p:nvSpPr>
           <p:spPr>
             <a:xfrm>
-              <a:off x="3735151" y="4058540"/>
+              <a:off x="3543092" y="3981333"/>
               <a:ext cx="49651" cy="49651"/>
             </a:xfrm>
             <a:prstGeom prst="ellipse">
@@ -5433,7 +5433,7 @@
           </p:nvSpPr>
           <p:spPr>
             <a:xfrm>
-              <a:off x="3543092" y="3981333"/>
+              <a:off x="4419068" y="4700185"/>
               <a:ext cx="49651" cy="49651"/>
             </a:xfrm>
             <a:prstGeom prst="ellipse">
@@ -5468,7 +5468,7 @@
           </p:nvSpPr>
           <p:spPr>
             <a:xfrm>
-              <a:off x="4419068" y="4700185"/>
+              <a:off x="3341699" y="4872866"/>
               <a:ext cx="49651" cy="49651"/>
             </a:xfrm>
             <a:prstGeom prst="ellipse">
@@ -5503,7 +5503,7 @@
           </p:nvSpPr>
           <p:spPr>
             <a:xfrm>
-              <a:off x="3341699" y="4872866"/>
+              <a:off x="3403353" y="5216709"/>
               <a:ext cx="49651" cy="49651"/>
             </a:xfrm>
             <a:prstGeom prst="ellipse">
@@ -5538,7 +5538,7 @@
           </p:nvSpPr>
           <p:spPr>
             <a:xfrm>
-              <a:off x="3403353" y="5216709"/>
+              <a:off x="2282296" y="4299826"/>
               <a:ext cx="49651" cy="49651"/>
             </a:xfrm>
             <a:prstGeom prst="ellipse">
@@ -5573,7 +5573,7 @@
           </p:nvSpPr>
           <p:spPr>
             <a:xfrm>
-              <a:off x="2282296" y="4299826"/>
+              <a:off x="1957436" y="4412403"/>
               <a:ext cx="49651" cy="49651"/>
             </a:xfrm>
             <a:prstGeom prst="ellipse">
@@ -5608,7 +5608,7 @@
           </p:nvSpPr>
           <p:spPr>
             <a:xfrm>
-              <a:off x="1957436" y="4412403"/>
+              <a:off x="3170079" y="4494186"/>
               <a:ext cx="49651" cy="49651"/>
             </a:xfrm>
             <a:prstGeom prst="ellipse">
@@ -5643,7 +5643,7 @@
           </p:nvSpPr>
           <p:spPr>
             <a:xfrm>
-              <a:off x="3170079" y="4494186"/>
+              <a:off x="3087264" y="5186370"/>
               <a:ext cx="49651" cy="49651"/>
             </a:xfrm>
             <a:prstGeom prst="ellipse">
@@ -5678,7 +5678,7 @@
           </p:nvSpPr>
           <p:spPr>
             <a:xfrm>
-              <a:off x="3087264" y="5186370"/>
+              <a:off x="4987975" y="4369012"/>
               <a:ext cx="49651" cy="49651"/>
             </a:xfrm>
             <a:prstGeom prst="ellipse">
@@ -5713,7 +5713,7 @@
           </p:nvSpPr>
           <p:spPr>
             <a:xfrm>
-              <a:off x="4987975" y="4369012"/>
+              <a:off x="4591458" y="3950134"/>
               <a:ext cx="49651" cy="49651"/>
             </a:xfrm>
             <a:prstGeom prst="ellipse">
@@ -5748,7 +5748,7 @@
           </p:nvSpPr>
           <p:spPr>
             <a:xfrm>
-              <a:off x="4591458" y="3950134"/>
+              <a:off x="2042519" y="4414740"/>
               <a:ext cx="49651" cy="49651"/>
             </a:xfrm>
             <a:prstGeom prst="ellipse">
@@ -5783,7 +5783,7 @@
           </p:nvSpPr>
           <p:spPr>
             <a:xfrm>
-              <a:off x="2042519" y="4414740"/>
+              <a:off x="4492720" y="4171259"/>
               <a:ext cx="49651" cy="49651"/>
             </a:xfrm>
             <a:prstGeom prst="ellipse">
@@ -5818,7 +5818,7 @@
           </p:nvSpPr>
           <p:spPr>
             <a:xfrm>
-              <a:off x="4492720" y="4171259"/>
+              <a:off x="3721239" y="4495810"/>
               <a:ext cx="49651" cy="49651"/>
             </a:xfrm>
             <a:prstGeom prst="ellipse">
@@ -5853,7 +5853,7 @@
           </p:nvSpPr>
           <p:spPr>
             <a:xfrm>
-              <a:off x="3721239" y="4495810"/>
+              <a:off x="2964740" y="4642912"/>
               <a:ext cx="49651" cy="49651"/>
             </a:xfrm>
             <a:prstGeom prst="ellipse">
@@ -5888,7 +5888,7 @@
           </p:nvSpPr>
           <p:spPr>
             <a:xfrm>
-              <a:off x="2964740" y="4642912"/>
+              <a:off x="4596502" y="3687010"/>
               <a:ext cx="49651" cy="49651"/>
             </a:xfrm>
             <a:prstGeom prst="ellipse">
@@ -5923,7 +5923,7 @@
           </p:nvSpPr>
           <p:spPr>
             <a:xfrm>
-              <a:off x="4596502" y="3687010"/>
+              <a:off x="3607483" y="4403215"/>
               <a:ext cx="49651" cy="49651"/>
             </a:xfrm>
             <a:prstGeom prst="ellipse">
@@ -5958,7 +5958,7 @@
           </p:nvSpPr>
           <p:spPr>
             <a:xfrm>
-              <a:off x="3607483" y="4403215"/>
+              <a:off x="3905742" y="5246686"/>
               <a:ext cx="49651" cy="49651"/>
             </a:xfrm>
             <a:prstGeom prst="ellipse">
@@ -5993,7 +5993,7 @@
           </p:nvSpPr>
           <p:spPr>
             <a:xfrm>
-              <a:off x="3905742" y="5246686"/>
+              <a:off x="4555731" y="4072001"/>
               <a:ext cx="49651" cy="49651"/>
             </a:xfrm>
             <a:prstGeom prst="ellipse">
@@ -6028,7 +6028,7 @@
           </p:nvSpPr>
           <p:spPr>
             <a:xfrm>
-              <a:off x="4555731" y="4072001"/>
+              <a:off x="4168711" y="4454483"/>
               <a:ext cx="49651" cy="49651"/>
             </a:xfrm>
             <a:prstGeom prst="ellipse">
@@ -6063,7 +6063,7 @@
           </p:nvSpPr>
           <p:spPr>
             <a:xfrm>
-              <a:off x="4168711" y="4454483"/>
+              <a:off x="7059480" y="4445833"/>
               <a:ext cx="49651" cy="49651"/>
             </a:xfrm>
             <a:prstGeom prst="ellipse">
@@ -6098,7 +6098,7 @@
           </p:nvSpPr>
           <p:spPr>
             <a:xfrm>
-              <a:off x="7059480" y="4445833"/>
+              <a:off x="4476421" y="5352216"/>
               <a:ext cx="49651" cy="49651"/>
             </a:xfrm>
             <a:prstGeom prst="ellipse">
@@ -6133,7 +6133,7 @@
           </p:nvSpPr>
           <p:spPr>
             <a:xfrm>
-              <a:off x="4476421" y="5352216"/>
+              <a:off x="3280448" y="4947064"/>
               <a:ext cx="49651" cy="49651"/>
             </a:xfrm>
             <a:prstGeom prst="ellipse">
@@ -6168,7 +6168,7 @@
           </p:nvSpPr>
           <p:spPr>
             <a:xfrm>
-              <a:off x="3280448" y="4947064"/>
+              <a:off x="2973507" y="4537735"/>
               <a:ext cx="49651" cy="49651"/>
             </a:xfrm>
             <a:prstGeom prst="ellipse">
@@ -6203,7 +6203,7 @@
           </p:nvSpPr>
           <p:spPr>
             <a:xfrm>
-              <a:off x="2973507" y="4537735"/>
+              <a:off x="3837119" y="5144097"/>
               <a:ext cx="49651" cy="49651"/>
             </a:xfrm>
             <a:prstGeom prst="ellipse">
@@ -6238,7 +6238,7 @@
           </p:nvSpPr>
           <p:spPr>
             <a:xfrm>
-              <a:off x="3837119" y="5144097"/>
+              <a:off x="1799832" y="4417943"/>
               <a:ext cx="49651" cy="49651"/>
             </a:xfrm>
             <a:prstGeom prst="ellipse">
@@ -6273,7 +6273,7 @@
           </p:nvSpPr>
           <p:spPr>
             <a:xfrm>
-              <a:off x="1799832" y="4417943"/>
+              <a:off x="3322142" y="4534072"/>
               <a:ext cx="49651" cy="49651"/>
             </a:xfrm>
             <a:prstGeom prst="ellipse">
@@ -6308,7 +6308,7 @@
           </p:nvSpPr>
           <p:spPr>
             <a:xfrm>
-              <a:off x="3322142" y="4534072"/>
+              <a:off x="3940718" y="4463844"/>
               <a:ext cx="49651" cy="49651"/>
             </a:xfrm>
             <a:prstGeom prst="ellipse">
@@ -6343,7 +6343,7 @@
           </p:nvSpPr>
           <p:spPr>
             <a:xfrm>
-              <a:off x="3940718" y="4463844"/>
+              <a:off x="4155369" y="3884761"/>
               <a:ext cx="49651" cy="49651"/>
             </a:xfrm>
             <a:prstGeom prst="ellipse">
@@ -6378,7 +6378,7 @@
           </p:nvSpPr>
           <p:spPr>
             <a:xfrm>
-              <a:off x="4155369" y="3884761"/>
+              <a:off x="2558437" y="3857991"/>
               <a:ext cx="49651" cy="49651"/>
             </a:xfrm>
             <a:prstGeom prst="ellipse">
@@ -6413,7 +6413,7 @@
           </p:nvSpPr>
           <p:spPr>
             <a:xfrm>
-              <a:off x="2558437" y="3857991"/>
+              <a:off x="2957862" y="5401751"/>
               <a:ext cx="49651" cy="49651"/>
             </a:xfrm>
             <a:prstGeom prst="ellipse">
@@ -6448,7 +6448,7 @@
           </p:nvSpPr>
           <p:spPr>
             <a:xfrm>
-              <a:off x="2957862" y="5401751"/>
+              <a:off x="3155225" y="5002640"/>
               <a:ext cx="49651" cy="49651"/>
             </a:xfrm>
             <a:prstGeom prst="ellipse">
@@ -6483,7 +6483,7 @@
           </p:nvSpPr>
           <p:spPr>
             <a:xfrm>
-              <a:off x="3155225" y="5002640"/>
+              <a:off x="2930795" y="5123265"/>
               <a:ext cx="49651" cy="49651"/>
             </a:xfrm>
             <a:prstGeom prst="ellipse">
@@ -6518,7 +6518,7 @@
           </p:nvSpPr>
           <p:spPr>
             <a:xfrm>
-              <a:off x="2930795" y="5123265"/>
+              <a:off x="4582558" y="4187576"/>
               <a:ext cx="49651" cy="49651"/>
             </a:xfrm>
             <a:prstGeom prst="ellipse">
@@ -6553,7 +6553,7 @@
           </p:nvSpPr>
           <p:spPr>
             <a:xfrm>
-              <a:off x="4582558" y="4187576"/>
+              <a:off x="2321115" y="4693152"/>
               <a:ext cx="49651" cy="49651"/>
             </a:xfrm>
             <a:prstGeom prst="ellipse">
@@ -6588,7 +6588,7 @@
           </p:nvSpPr>
           <p:spPr>
             <a:xfrm>
-              <a:off x="2321115" y="4693152"/>
+              <a:off x="3732644" y="4166656"/>
               <a:ext cx="49651" cy="49651"/>
             </a:xfrm>
             <a:prstGeom prst="ellipse">
@@ -6623,7 +6623,7 @@
           </p:nvSpPr>
           <p:spPr>
             <a:xfrm>
-              <a:off x="3732644" y="4166656"/>
+              <a:off x="2992466" y="5107206"/>
               <a:ext cx="49651" cy="49651"/>
             </a:xfrm>
             <a:prstGeom prst="ellipse">
@@ -6658,7 +6658,7 @@
           </p:nvSpPr>
           <p:spPr>
             <a:xfrm>
-              <a:off x="2992466" y="5107206"/>
+              <a:off x="4441344" y="4218465"/>
               <a:ext cx="49651" cy="49651"/>
             </a:xfrm>
             <a:prstGeom prst="ellipse">
@@ -6693,7 +6693,7 @@
           </p:nvSpPr>
           <p:spPr>
             <a:xfrm>
-              <a:off x="4441344" y="4218465"/>
+              <a:off x="3357178" y="4303724"/>
               <a:ext cx="49651" cy="49651"/>
             </a:xfrm>
             <a:prstGeom prst="ellipse">
@@ -6728,7 +6728,7 @@
           </p:nvSpPr>
           <p:spPr>
             <a:xfrm>
-              <a:off x="3357178" y="4303724"/>
+              <a:off x="5504305" y="4445833"/>
               <a:ext cx="49651" cy="49651"/>
             </a:xfrm>
             <a:prstGeom prst="ellipse">
@@ -6763,7 +6763,7 @@
           </p:nvSpPr>
           <p:spPr>
             <a:xfrm>
-              <a:off x="5504305" y="4445833"/>
+              <a:off x="2520623" y="5355399"/>
               <a:ext cx="49651" cy="49651"/>
             </a:xfrm>
             <a:prstGeom prst="ellipse">
@@ -6798,7 +6798,7 @@
           </p:nvSpPr>
           <p:spPr>
             <a:xfrm>
-              <a:off x="2520623" y="5355399"/>
+              <a:off x="2926141" y="5409570"/>
               <a:ext cx="49651" cy="49651"/>
             </a:xfrm>
             <a:prstGeom prst="ellipse">
@@ -6833,7 +6833,7 @@
           </p:nvSpPr>
           <p:spPr>
             <a:xfrm>
-              <a:off x="2926141" y="5409570"/>
+              <a:off x="4503111" y="5288071"/>
               <a:ext cx="49651" cy="49651"/>
             </a:xfrm>
             <a:prstGeom prst="ellipse">
@@ -6868,7 +6868,7 @@
           </p:nvSpPr>
           <p:spPr>
             <a:xfrm>
-              <a:off x="4503111" y="5288071"/>
+              <a:off x="4880658" y="4780833"/>
               <a:ext cx="49651" cy="49651"/>
             </a:xfrm>
             <a:prstGeom prst="ellipse">
@@ -6903,7 +6903,7 @@
           </p:nvSpPr>
           <p:spPr>
             <a:xfrm>
-              <a:off x="4880658" y="4780833"/>
+              <a:off x="6778942" y="4445833"/>
               <a:ext cx="49651" cy="49651"/>
             </a:xfrm>
             <a:prstGeom prst="ellipse">
@@ -6938,7 +6938,7 @@
           </p:nvSpPr>
           <p:spPr>
             <a:xfrm>
-              <a:off x="6778942" y="4445833"/>
+              <a:off x="4162100" y="4890110"/>
               <a:ext cx="49651" cy="49651"/>
             </a:xfrm>
             <a:prstGeom prst="ellipse">
@@ -6973,7 +6973,7 @@
           </p:nvSpPr>
           <p:spPr>
             <a:xfrm>
-              <a:off x="4162100" y="4890110"/>
+              <a:off x="5003623" y="2045672"/>
               <a:ext cx="49651" cy="49651"/>
             </a:xfrm>
             <a:prstGeom prst="ellipse">
@@ -7008,7 +7008,7 @@
           </p:nvSpPr>
           <p:spPr>
             <a:xfrm>
-              <a:off x="5003623" y="2045672"/>
+              <a:off x="3263445" y="4881211"/>
               <a:ext cx="49651" cy="49651"/>
             </a:xfrm>
             <a:prstGeom prst="ellipse">
@@ -7043,7 +7043,7 @@
           </p:nvSpPr>
           <p:spPr>
             <a:xfrm>
-              <a:off x="3263445" y="4881211"/>
+              <a:off x="4558253" y="4192905"/>
               <a:ext cx="49651" cy="49651"/>
             </a:xfrm>
             <a:prstGeom prst="ellipse">
@@ -7078,7 +7078,7 @@
           </p:nvSpPr>
           <p:spPr>
             <a:xfrm>
-              <a:off x="4558253" y="4192905"/>
+              <a:off x="2338590" y="4316817"/>
               <a:ext cx="49651" cy="49651"/>
             </a:xfrm>
             <a:prstGeom prst="ellipse">
@@ -7113,7 +7113,7 @@
           </p:nvSpPr>
           <p:spPr>
             <a:xfrm>
-              <a:off x="2338590" y="4316817"/>
+              <a:off x="2942048" y="4499796"/>
               <a:ext cx="49651" cy="49651"/>
             </a:xfrm>
             <a:prstGeom prst="ellipse">
@@ -7148,7 +7148,7 @@
           </p:nvSpPr>
           <p:spPr>
             <a:xfrm>
-              <a:off x="2942048" y="4499796"/>
+              <a:off x="5658466" y="3855548"/>
               <a:ext cx="49651" cy="49651"/>
             </a:xfrm>
             <a:prstGeom prst="ellipse">
@@ -7183,7 +7183,7 @@
           </p:nvSpPr>
           <p:spPr>
             <a:xfrm>
-              <a:off x="5658466" y="3855548"/>
+              <a:off x="3747413" y="4410928"/>
               <a:ext cx="49651" cy="49651"/>
             </a:xfrm>
             <a:prstGeom prst="ellipse">
@@ -7218,7 +7218,7 @@
           </p:nvSpPr>
           <p:spPr>
             <a:xfrm>
-              <a:off x="3747413" y="4410928"/>
+              <a:off x="3862667" y="4264387"/>
               <a:ext cx="49651" cy="49651"/>
             </a:xfrm>
             <a:prstGeom prst="ellipse">
@@ -7253,7 +7253,7 @@
           </p:nvSpPr>
           <p:spPr>
             <a:xfrm>
-              <a:off x="3862667" y="4264387"/>
+              <a:off x="4987790" y="3344681"/>
               <a:ext cx="49651" cy="49651"/>
             </a:xfrm>
             <a:prstGeom prst="ellipse">
@@ -7288,7 +7288,7 @@
           </p:nvSpPr>
           <p:spPr>
             <a:xfrm>
-              <a:off x="4987790" y="3344681"/>
+              <a:off x="5468231" y="4445833"/>
               <a:ext cx="49651" cy="49651"/>
             </a:xfrm>
             <a:prstGeom prst="ellipse">
@@ -7323,7 +7323,7 @@
           </p:nvSpPr>
           <p:spPr>
             <a:xfrm>
-              <a:off x="5468231" y="4445833"/>
+              <a:off x="4296926" y="3646555"/>
               <a:ext cx="49651" cy="49651"/>
             </a:xfrm>
             <a:prstGeom prst="ellipse">
@@ -7358,7 +7358,7 @@
           </p:nvSpPr>
           <p:spPr>
             <a:xfrm>
-              <a:off x="4296926" y="3646555"/>
+              <a:off x="4506093" y="4433986"/>
               <a:ext cx="49651" cy="49651"/>
             </a:xfrm>
             <a:prstGeom prst="ellipse">
@@ -7393,7 +7393,7 @@
           </p:nvSpPr>
           <p:spPr>
             <a:xfrm>
-              <a:off x="4506093" y="4433986"/>
+              <a:off x="2890116" y="4683142"/>
               <a:ext cx="49651" cy="49651"/>
             </a:xfrm>
             <a:prstGeom prst="ellipse">
@@ -7428,7 +7428,7 @@
           </p:nvSpPr>
           <p:spPr>
             <a:xfrm>
-              <a:off x="2890116" y="4683142"/>
+              <a:off x="3568461" y="4676490"/>
               <a:ext cx="49651" cy="49651"/>
             </a:xfrm>
             <a:prstGeom prst="ellipse">
@@ -7463,7 +7463,7 @@
           </p:nvSpPr>
           <p:spPr>
             <a:xfrm>
-              <a:off x="3568461" y="4676490"/>
+              <a:off x="2485745" y="4425680"/>
               <a:ext cx="49651" cy="49651"/>
             </a:xfrm>
             <a:prstGeom prst="ellipse">
@@ -7498,7 +7498,7 @@
           </p:nvSpPr>
           <p:spPr>
             <a:xfrm>
-              <a:off x="2485745" y="4425680"/>
+              <a:off x="4365718" y="4353195"/>
               <a:ext cx="49651" cy="49651"/>
             </a:xfrm>
             <a:prstGeom prst="ellipse">
@@ -7533,7 +7533,7 @@
           </p:nvSpPr>
           <p:spPr>
             <a:xfrm>
-              <a:off x="4365718" y="4353195"/>
+              <a:off x="4393362" y="4501817"/>
               <a:ext cx="49651" cy="49651"/>
             </a:xfrm>
             <a:prstGeom prst="ellipse">
@@ -7568,7 +7568,7 @@
           </p:nvSpPr>
           <p:spPr>
             <a:xfrm>
-              <a:off x="4393362" y="4501817"/>
+              <a:off x="2605882" y="4926349"/>
               <a:ext cx="49651" cy="49651"/>
             </a:xfrm>
             <a:prstGeom prst="ellipse">
@@ -7603,7 +7603,7 @@
           </p:nvSpPr>
           <p:spPr>
             <a:xfrm>
-              <a:off x="2605882" y="4926349"/>
+              <a:off x="4715398" y="4519950"/>
               <a:ext cx="49651" cy="49651"/>
             </a:xfrm>
             <a:prstGeom prst="ellipse">
@@ -7638,7 +7638,7 @@
           </p:nvSpPr>
           <p:spPr>
             <a:xfrm>
-              <a:off x="4715398" y="4519950"/>
+              <a:off x="4671188" y="4472448"/>
               <a:ext cx="49651" cy="49651"/>
             </a:xfrm>
             <a:prstGeom prst="ellipse">
@@ -7673,7 +7673,7 @@
           </p:nvSpPr>
           <p:spPr>
             <a:xfrm>
-              <a:off x="4671188" y="4472448"/>
+              <a:off x="3654286" y="4121146"/>
               <a:ext cx="49651" cy="49651"/>
             </a:xfrm>
             <a:prstGeom prst="ellipse">
@@ -7708,7 +7708,7 @@
           </p:nvSpPr>
           <p:spPr>
             <a:xfrm>
-              <a:off x="3654286" y="4121146"/>
+              <a:off x="3733758" y="4959254"/>
               <a:ext cx="49651" cy="49651"/>
             </a:xfrm>
             <a:prstGeom prst="ellipse">
@@ -7743,7 +7743,7 @@
           </p:nvSpPr>
           <p:spPr>
             <a:xfrm>
-              <a:off x="3733758" y="4959254"/>
+              <a:off x="6172802" y="4445833"/>
               <a:ext cx="49651" cy="49651"/>
             </a:xfrm>
             <a:prstGeom prst="ellipse">
@@ -7778,7 +7778,7 @@
           </p:nvSpPr>
           <p:spPr>
             <a:xfrm>
-              <a:off x="6172802" y="4445833"/>
+              <a:off x="6072317" y="4445833"/>
               <a:ext cx="49651" cy="49651"/>
             </a:xfrm>
             <a:prstGeom prst="ellipse">
@@ -7813,7 +7813,7 @@
           </p:nvSpPr>
           <p:spPr>
             <a:xfrm>
-              <a:off x="6072317" y="4445833"/>
+              <a:off x="6297076" y="3748356"/>
               <a:ext cx="49651" cy="49651"/>
             </a:xfrm>
             <a:prstGeom prst="ellipse">
@@ -7848,7 +7848,7 @@
           </p:nvSpPr>
           <p:spPr>
             <a:xfrm>
-              <a:off x="6297076" y="3748356"/>
+              <a:off x="5149442" y="4217579"/>
               <a:ext cx="49651" cy="49651"/>
             </a:xfrm>
             <a:prstGeom prst="ellipse">
@@ -7883,7 +7883,7 @@
           </p:nvSpPr>
           <p:spPr>
             <a:xfrm>
-              <a:off x="5149442" y="4217579"/>
+              <a:off x="4273538" y="4335002"/>
               <a:ext cx="49651" cy="49651"/>
             </a:xfrm>
             <a:prstGeom prst="ellipse">
@@ -7918,7 +7918,7 @@
           </p:nvSpPr>
           <p:spPr>
             <a:xfrm>
-              <a:off x="4273538" y="4335002"/>
+              <a:off x="5681118" y="3427490"/>
               <a:ext cx="49651" cy="49651"/>
             </a:xfrm>
             <a:prstGeom prst="ellipse">
@@ -7953,7 +7953,7 @@
           </p:nvSpPr>
           <p:spPr>
             <a:xfrm>
-              <a:off x="5681118" y="3427490"/>
+              <a:off x="3182643" y="4745209"/>
               <a:ext cx="49651" cy="49651"/>
             </a:xfrm>
             <a:prstGeom prst="ellipse">
@@ -7988,7 +7988,7 @@
           </p:nvSpPr>
           <p:spPr>
             <a:xfrm>
-              <a:off x="3182643" y="4745209"/>
+              <a:off x="3841709" y="4624715"/>
               <a:ext cx="49651" cy="49651"/>
             </a:xfrm>
             <a:prstGeom prst="ellipse">
@@ -8023,7 +8023,7 @@
           </p:nvSpPr>
           <p:spPr>
             <a:xfrm>
-              <a:off x="3841709" y="4624715"/>
+              <a:off x="2564839" y="4437866"/>
               <a:ext cx="49651" cy="49651"/>
             </a:xfrm>
             <a:prstGeom prst="ellipse">
@@ -8058,7 +8058,7 @@
           </p:nvSpPr>
           <p:spPr>
             <a:xfrm>
-              <a:off x="2564839" y="4437866"/>
+              <a:off x="5107705" y="4625159"/>
               <a:ext cx="49651" cy="49651"/>
             </a:xfrm>
             <a:prstGeom prst="ellipse">
@@ -8093,7 +8093,7 @@
           </p:nvSpPr>
           <p:spPr>
             <a:xfrm>
-              <a:off x="5107705" y="4625159"/>
+              <a:off x="4744559" y="3033369"/>
               <a:ext cx="49651" cy="49651"/>
             </a:xfrm>
             <a:prstGeom prst="ellipse">
@@ -8128,7 +8128,7 @@
           </p:nvSpPr>
           <p:spPr>
             <a:xfrm>
-              <a:off x="4744559" y="3033369"/>
+              <a:off x="2415429" y="4446898"/>
               <a:ext cx="49651" cy="49651"/>
             </a:xfrm>
             <a:prstGeom prst="ellipse">
@@ -8163,7 +8163,7 @@
           </p:nvSpPr>
           <p:spPr>
             <a:xfrm>
-              <a:off x="2415429" y="4446898"/>
+              <a:off x="2830755" y="4723173"/>
               <a:ext cx="49651" cy="49651"/>
             </a:xfrm>
             <a:prstGeom prst="ellipse">
@@ -8198,7 +8198,7 @@
           </p:nvSpPr>
           <p:spPr>
             <a:xfrm>
-              <a:off x="2830755" y="4723173"/>
+              <a:off x="2808937" y="4460497"/>
               <a:ext cx="49651" cy="49651"/>
             </a:xfrm>
             <a:prstGeom prst="ellipse">
@@ -8233,7 +8233,7 @@
           </p:nvSpPr>
           <p:spPr>
             <a:xfrm>
-              <a:off x="2808937" y="4460497"/>
+              <a:off x="3800790" y="4642183"/>
               <a:ext cx="49651" cy="49651"/>
             </a:xfrm>
             <a:prstGeom prst="ellipse">
@@ -8268,7 +8268,7 @@
           </p:nvSpPr>
           <p:spPr>
             <a:xfrm>
-              <a:off x="3800790" y="4642183"/>
+              <a:off x="5360931" y="2889224"/>
               <a:ext cx="49651" cy="49651"/>
             </a:xfrm>
             <a:prstGeom prst="ellipse">
@@ -8303,7 +8303,7 @@
           </p:nvSpPr>
           <p:spPr>
             <a:xfrm>
-              <a:off x="5360931" y="2889224"/>
+              <a:off x="7416008" y="3517888"/>
               <a:ext cx="49651" cy="49651"/>
             </a:xfrm>
             <a:prstGeom prst="ellipse">
@@ -8338,7 +8338,7 @@
           </p:nvSpPr>
           <p:spPr>
             <a:xfrm>
-              <a:off x="7416008" y="3517888"/>
+              <a:off x="4255109" y="3974488"/>
               <a:ext cx="49651" cy="49651"/>
             </a:xfrm>
             <a:prstGeom prst="ellipse">
@@ -8373,7 +8373,7 @@
           </p:nvSpPr>
           <p:spPr>
             <a:xfrm>
-              <a:off x="4255109" y="3974488"/>
+              <a:off x="3318137" y="4721398"/>
               <a:ext cx="49651" cy="49651"/>
             </a:xfrm>
             <a:prstGeom prst="ellipse">
@@ -8408,7 +8408,7 @@
           </p:nvSpPr>
           <p:spPr>
             <a:xfrm>
-              <a:off x="3318137" y="4721398"/>
+              <a:off x="4940181" y="3715943"/>
               <a:ext cx="49651" cy="49651"/>
             </a:xfrm>
             <a:prstGeom prst="ellipse">
@@ -8443,7 +8443,7 @@
           </p:nvSpPr>
           <p:spPr>
             <a:xfrm>
-              <a:off x="4940181" y="3715943"/>
+              <a:off x="4737656" y="4181122"/>
               <a:ext cx="49651" cy="49651"/>
             </a:xfrm>
             <a:prstGeom prst="ellipse">
@@ -8478,7 +8478,7 @@
           </p:nvSpPr>
           <p:spPr>
             <a:xfrm>
-              <a:off x="4737656" y="4181122"/>
+              <a:off x="6460700" y="4445833"/>
               <a:ext cx="49651" cy="49651"/>
             </a:xfrm>
             <a:prstGeom prst="ellipse">
@@ -8513,7 +8513,7 @@
           </p:nvSpPr>
           <p:spPr>
             <a:xfrm>
-              <a:off x="6460700" y="4445833"/>
+              <a:off x="2822997" y="4762480"/>
               <a:ext cx="49651" cy="49651"/>
             </a:xfrm>
             <a:prstGeom prst="ellipse">
@@ -8548,7 +8548,7 @@
           </p:nvSpPr>
           <p:spPr>
             <a:xfrm>
-              <a:off x="2822997" y="4762480"/>
+              <a:off x="2646617" y="3831071"/>
               <a:ext cx="49651" cy="49651"/>
             </a:xfrm>
             <a:prstGeom prst="ellipse">
@@ -8583,7 +8583,7 @@
           </p:nvSpPr>
           <p:spPr>
             <a:xfrm>
-              <a:off x="2646617" y="3831071"/>
+              <a:off x="4547704" y="4325793"/>
               <a:ext cx="49651" cy="49651"/>
             </a:xfrm>
             <a:prstGeom prst="ellipse">
@@ -8618,7 +8618,7 @@
           </p:nvSpPr>
           <p:spPr>
             <a:xfrm>
-              <a:off x="4547704" y="4325793"/>
+              <a:off x="4520248" y="4600590"/>
               <a:ext cx="49651" cy="49651"/>
             </a:xfrm>
             <a:prstGeom prst="ellipse">
@@ -8653,7 +8653,7 @@
           </p:nvSpPr>
           <p:spPr>
             <a:xfrm>
-              <a:off x="4520248" y="4600590"/>
+              <a:off x="3335301" y="4490617"/>
               <a:ext cx="49651" cy="49651"/>
             </a:xfrm>
             <a:prstGeom prst="ellipse">
@@ -8688,7 +8688,7 @@
           </p:nvSpPr>
           <p:spPr>
             <a:xfrm>
-              <a:off x="3335301" y="4490617"/>
+              <a:off x="3606733" y="3898825"/>
               <a:ext cx="49651" cy="49651"/>
             </a:xfrm>
             <a:prstGeom prst="ellipse">
@@ -8723,7 +8723,7 @@
           </p:nvSpPr>
           <p:spPr>
             <a:xfrm>
-              <a:off x="3606733" y="3898825"/>
+              <a:off x="4842035" y="5038214"/>
               <a:ext cx="49651" cy="49651"/>
             </a:xfrm>
             <a:prstGeom prst="ellipse">
@@ -8758,7 +8758,7 @@
           </p:nvSpPr>
           <p:spPr>
             <a:xfrm>
-              <a:off x="4842035" y="5038214"/>
+              <a:off x="5137254" y="4445833"/>
               <a:ext cx="49651" cy="49651"/>
             </a:xfrm>
             <a:prstGeom prst="ellipse">
@@ -8793,7 +8793,7 @@
           </p:nvSpPr>
           <p:spPr>
             <a:xfrm>
-              <a:off x="5137254" y="4445833"/>
+              <a:off x="3859378" y="3528419"/>
               <a:ext cx="49651" cy="49651"/>
             </a:xfrm>
             <a:prstGeom prst="ellipse">
@@ -8828,7 +8828,7 @@
           </p:nvSpPr>
           <p:spPr>
             <a:xfrm>
-              <a:off x="3859378" y="3528419"/>
+              <a:off x="2400862" y="4654316"/>
               <a:ext cx="49651" cy="49651"/>
             </a:xfrm>
             <a:prstGeom prst="ellipse">
@@ -8863,7 +8863,7 @@
           </p:nvSpPr>
           <p:spPr>
             <a:xfrm>
-              <a:off x="2400862" y="4654316"/>
+              <a:off x="3915111" y="4544653"/>
               <a:ext cx="49651" cy="49651"/>
             </a:xfrm>
             <a:prstGeom prst="ellipse">
@@ -8898,7 +8898,7 @@
           </p:nvSpPr>
           <p:spPr>
             <a:xfrm>
-              <a:off x="3915111" y="4544653"/>
+              <a:off x="2730645" y="5237120"/>
               <a:ext cx="49651" cy="49651"/>
             </a:xfrm>
             <a:prstGeom prst="ellipse">
@@ -8933,7 +8933,7 @@
           </p:nvSpPr>
           <p:spPr>
             <a:xfrm>
-              <a:off x="2730645" y="5237120"/>
+              <a:off x="8245197" y="4445833"/>
               <a:ext cx="49651" cy="49651"/>
             </a:xfrm>
             <a:prstGeom prst="ellipse">
@@ -8968,7 +8968,7 @@
           </p:nvSpPr>
           <p:spPr>
             <a:xfrm>
-              <a:off x="8245197" y="4445833"/>
+              <a:off x="2660861" y="3430954"/>
               <a:ext cx="49651" cy="49651"/>
             </a:xfrm>
             <a:prstGeom prst="ellipse">
@@ -9003,7 +9003,7 @@
           </p:nvSpPr>
           <p:spPr>
             <a:xfrm>
-              <a:off x="2660861" y="3430954"/>
+              <a:off x="1301453" y="4404523"/>
               <a:ext cx="49651" cy="49651"/>
             </a:xfrm>
             <a:prstGeom prst="ellipse">
@@ -9038,7 +9038,7 @@
           </p:nvSpPr>
           <p:spPr>
             <a:xfrm>
-              <a:off x="1301453" y="4404523"/>
+              <a:off x="5119430" y="4186577"/>
               <a:ext cx="49651" cy="49651"/>
             </a:xfrm>
             <a:prstGeom prst="ellipse">
@@ -9073,7 +9073,7 @@
           </p:nvSpPr>
           <p:spPr>
             <a:xfrm>
-              <a:off x="5119430" y="4186577"/>
+              <a:off x="2853933" y="4772366"/>
               <a:ext cx="49651" cy="49651"/>
             </a:xfrm>
             <a:prstGeom prst="ellipse">
@@ -9108,7 +9108,7 @@
           </p:nvSpPr>
           <p:spPr>
             <a:xfrm>
-              <a:off x="2853933" y="4772366"/>
+              <a:off x="3737421" y="5367467"/>
               <a:ext cx="49651" cy="49651"/>
             </a:xfrm>
             <a:prstGeom prst="ellipse">
@@ -9143,7 +9143,7 @@
           </p:nvSpPr>
           <p:spPr>
             <a:xfrm>
-              <a:off x="3737421" y="5367467"/>
+              <a:off x="5751932" y="3901318"/>
               <a:ext cx="49651" cy="49651"/>
             </a:xfrm>
             <a:prstGeom prst="ellipse">
@@ -9178,7 +9178,7 @@
           </p:nvSpPr>
           <p:spPr>
             <a:xfrm>
-              <a:off x="5751932" y="3901318"/>
+              <a:off x="3809289" y="4533276"/>
               <a:ext cx="49651" cy="49651"/>
             </a:xfrm>
             <a:prstGeom prst="ellipse">
@@ -9213,7 +9213,7 @@
           </p:nvSpPr>
           <p:spPr>
             <a:xfrm>
-              <a:off x="3809289" y="4533276"/>
+              <a:off x="4712786" y="4817603"/>
               <a:ext cx="49651" cy="49651"/>
             </a:xfrm>
             <a:prstGeom prst="ellipse">
@@ -9248,7 +9248,7 @@
           </p:nvSpPr>
           <p:spPr>
             <a:xfrm>
-              <a:off x="4712786" y="4817603"/>
+              <a:off x="7125321" y="4445833"/>
               <a:ext cx="49651" cy="49651"/>
             </a:xfrm>
             <a:prstGeom prst="ellipse">
@@ -9283,7 +9283,7 @@
           </p:nvSpPr>
           <p:spPr>
             <a:xfrm>
-              <a:off x="7125321" y="4445833"/>
+              <a:off x="2751512" y="4849148"/>
               <a:ext cx="49651" cy="49651"/>
             </a:xfrm>
             <a:prstGeom prst="ellipse">
@@ -9318,7 +9318,7 @@
           </p:nvSpPr>
           <p:spPr>
             <a:xfrm>
-              <a:off x="2751512" y="4849148"/>
+              <a:off x="6170910" y="4445833"/>
               <a:ext cx="49651" cy="49651"/>
             </a:xfrm>
             <a:prstGeom prst="ellipse">
@@ -9353,7 +9353,7 @@
           </p:nvSpPr>
           <p:spPr>
             <a:xfrm>
-              <a:off x="6170910" y="4445833"/>
+              <a:off x="2998189" y="4396179"/>
               <a:ext cx="49651" cy="49651"/>
             </a:xfrm>
             <a:prstGeom prst="ellipse">
@@ -9388,7 +9388,7 @@
           </p:nvSpPr>
           <p:spPr>
             <a:xfrm>
-              <a:off x="2998189" y="4396179"/>
+              <a:off x="3088960" y="4795669"/>
               <a:ext cx="49651" cy="49651"/>
             </a:xfrm>
             <a:prstGeom prst="ellipse">
@@ -9423,7 +9423,7 @@
           </p:nvSpPr>
           <p:spPr>
             <a:xfrm>
-              <a:off x="3088960" y="4795669"/>
+              <a:off x="4229392" y="4662134"/>
               <a:ext cx="49651" cy="49651"/>
             </a:xfrm>
             <a:prstGeom prst="ellipse">
@@ -9458,7 +9458,7 @@
           </p:nvSpPr>
           <p:spPr>
             <a:xfrm>
-              <a:off x="4229392" y="4662134"/>
+              <a:off x="3530658" y="4446899"/>
               <a:ext cx="49651" cy="49651"/>
             </a:xfrm>
             <a:prstGeom prst="ellipse">
@@ -9493,7 +9493,7 @@
           </p:nvSpPr>
           <p:spPr>
             <a:xfrm>
-              <a:off x="3530658" y="4446899"/>
+              <a:off x="6248010" y="4445833"/>
               <a:ext cx="49651" cy="49651"/>
             </a:xfrm>
             <a:prstGeom prst="ellipse">
@@ -9528,7 +9528,7 @@
           </p:nvSpPr>
           <p:spPr>
             <a:xfrm>
-              <a:off x="6248010" y="4445833"/>
+              <a:off x="6467976" y="4445833"/>
               <a:ext cx="49651" cy="49651"/>
             </a:xfrm>
             <a:prstGeom prst="ellipse">
@@ -9563,7 +9563,7 @@
           </p:nvSpPr>
           <p:spPr>
             <a:xfrm>
-              <a:off x="6467976" y="4445833"/>
+              <a:off x="5143294" y="4194437"/>
               <a:ext cx="49651" cy="49651"/>
             </a:xfrm>
             <a:prstGeom prst="ellipse">
@@ -9598,7 +9598,7 @@
           </p:nvSpPr>
           <p:spPr>
             <a:xfrm>
-              <a:off x="5143294" y="4194437"/>
+              <a:off x="3824238" y="4439028"/>
               <a:ext cx="49651" cy="49651"/>
             </a:xfrm>
             <a:prstGeom prst="ellipse">
@@ -9633,7 +9633,7 @@
           </p:nvSpPr>
           <p:spPr>
             <a:xfrm>
-              <a:off x="3824238" y="4439028"/>
+              <a:off x="3716468" y="4428189"/>
               <a:ext cx="49651" cy="49651"/>
             </a:xfrm>
             <a:prstGeom prst="ellipse">
@@ -9668,41 +9668,6 @@
           </p:nvSpPr>
           <p:spPr>
             <a:xfrm>
-              <a:off x="3716468" y="4428189"/>
-              <a:ext cx="49651" cy="49651"/>
-            </a:xfrm>
-            <a:prstGeom prst="ellipse">
-              <a:avLst/>
-            </a:prstGeom>
-            <a:solidFill>
-              <a:srgbClr val="000000">
-                <a:alpha val="29803"/>
-              </a:srgbClr>
-            </a:solidFill>
-            <a:ln w="9000" cap="rnd">
-              <a:solidFill>
-                <a:srgbClr val="000000">
-                  <a:alpha val="29803"/>
-                </a:srgbClr>
-              </a:solidFill>
-              <a:prstDash val="solid"/>
-              <a:round/>
-            </a:ln>
-          </p:spPr>
-          <p:txBody>
-            <a:bodyPr/>
-            <a:lstStyle/>
-            <a:p/>
-          </p:txBody>
-        </p:sp>
-        <p:sp>
-          <p:nvSpPr>
-            <p:cNvPr id="212" name="pt212"/>
-            <p:cNvSpPr/>
-            <p:nvPr/>
-          </p:nvSpPr>
-          <p:spPr>
-            <a:xfrm>
               <a:off x="4619120" y="3821105"/>
               <a:ext cx="49651" cy="49651"/>
             </a:xfrm>
@@ -9732,498 +9697,498 @@
         </p:sp>
         <p:sp>
           <p:nvSpPr>
-            <p:cNvPr id="213" name="pg213"/>
-            <p:cNvSpPr/>
-            <p:nvPr/>
-          </p:nvSpPr>
-          <p:spPr>
-            <a:xfrm>
-              <a:off x="1326279" y="3588658"/>
-              <a:ext cx="6943744" cy="1472468"/>
+            <p:cNvPr id="212" name="pg212"/>
+            <p:cNvSpPr/>
+            <p:nvPr/>
+          </p:nvSpPr>
+          <p:spPr>
+            <a:xfrm>
+              <a:off x="1326279" y="3584791"/>
+              <a:ext cx="6943744" cy="1484447"/>
             </a:xfrm>
             <a:custGeom>
               <a:avLst/>
               <a:pathLst>
-                <a:path w="6943744" h="1472468">
+                <a:path w="6943744" h="1484447">
                   <a:moveTo>
-                    <a:pt x="0" y="1155577"/>
+                    <a:pt x="0" y="1167506"/>
                   </a:moveTo>
                   <a:lnTo>
-                    <a:pt x="87895" y="1146527"/>
-                  </a:lnTo>
-                  <a:lnTo>
-                    <a:pt x="175790" y="1137448"/>
-                  </a:lnTo>
-                  <a:lnTo>
-                    <a:pt x="263686" y="1128337"/>
-                  </a:lnTo>
-                  <a:lnTo>
-                    <a:pt x="351581" y="1119192"/>
-                  </a:lnTo>
-                  <a:lnTo>
-                    <a:pt x="439477" y="1110008"/>
-                  </a:lnTo>
-                  <a:lnTo>
-                    <a:pt x="527372" y="1100783"/>
-                  </a:lnTo>
-                  <a:lnTo>
-                    <a:pt x="615268" y="1091512"/>
-                  </a:lnTo>
-                  <a:lnTo>
-                    <a:pt x="703163" y="1082190"/>
-                  </a:lnTo>
-                  <a:lnTo>
-                    <a:pt x="791059" y="1072813"/>
-                  </a:lnTo>
-                  <a:lnTo>
-                    <a:pt x="878954" y="1063374"/>
-                  </a:lnTo>
-                  <a:lnTo>
-                    <a:pt x="966850" y="1053867"/>
-                  </a:lnTo>
-                  <a:lnTo>
-                    <a:pt x="1054745" y="1044284"/>
-                  </a:lnTo>
-                  <a:lnTo>
-                    <a:pt x="1142641" y="1034617"/>
-                  </a:lnTo>
-                  <a:lnTo>
-                    <a:pt x="1230536" y="1024857"/>
-                  </a:lnTo>
-                  <a:lnTo>
-                    <a:pt x="1318432" y="1014992"/>
-                  </a:lnTo>
-                  <a:lnTo>
-                    <a:pt x="1406327" y="1005011"/>
-                  </a:lnTo>
-                  <a:lnTo>
-                    <a:pt x="1494223" y="994901"/>
-                  </a:lnTo>
-                  <a:lnTo>
-                    <a:pt x="1582118" y="984645"/>
-                  </a:lnTo>
-                  <a:lnTo>
-                    <a:pt x="1670014" y="974229"/>
-                  </a:lnTo>
-                  <a:lnTo>
-                    <a:pt x="1757909" y="963633"/>
-                  </a:lnTo>
-                  <a:lnTo>
-                    <a:pt x="1845805" y="952839"/>
-                  </a:lnTo>
-                  <a:lnTo>
-                    <a:pt x="1933700" y="941824"/>
-                  </a:lnTo>
-                  <a:lnTo>
-                    <a:pt x="2021596" y="930569"/>
-                  </a:lnTo>
-                  <a:lnTo>
-                    <a:pt x="2109491" y="919049"/>
-                  </a:lnTo>
-                  <a:lnTo>
-                    <a:pt x="2197387" y="907244"/>
-                  </a:lnTo>
-                  <a:lnTo>
-                    <a:pt x="2285282" y="895133"/>
-                  </a:lnTo>
-                  <a:lnTo>
-                    <a:pt x="2373178" y="882697"/>
-                  </a:lnTo>
-                  <a:lnTo>
-                    <a:pt x="2461073" y="869923"/>
-                  </a:lnTo>
-                  <a:lnTo>
-                    <a:pt x="2548969" y="856799"/>
-                  </a:lnTo>
-                  <a:lnTo>
-                    <a:pt x="2636864" y="843321"/>
-                  </a:lnTo>
-                  <a:lnTo>
-                    <a:pt x="2724760" y="829488"/>
-                  </a:lnTo>
-                  <a:lnTo>
-                    <a:pt x="2812655" y="815306"/>
-                  </a:lnTo>
-                  <a:lnTo>
-                    <a:pt x="2900551" y="800788"/>
-                  </a:lnTo>
-                  <a:lnTo>
-                    <a:pt x="2988446" y="785946"/>
-                  </a:lnTo>
-                  <a:lnTo>
-                    <a:pt x="3076342" y="770801"/>
-                  </a:lnTo>
-                  <a:lnTo>
-                    <a:pt x="3164237" y="755373"/>
-                  </a:lnTo>
-                  <a:lnTo>
-                    <a:pt x="3252133" y="739684"/>
-                  </a:lnTo>
-                  <a:lnTo>
-                    <a:pt x="3340028" y="723756"/>
-                  </a:lnTo>
-                  <a:lnTo>
-                    <a:pt x="3427924" y="707611"/>
-                  </a:lnTo>
-                  <a:lnTo>
-                    <a:pt x="3515819" y="691269"/>
-                  </a:lnTo>
-                  <a:lnTo>
-                    <a:pt x="3603715" y="674750"/>
-                  </a:lnTo>
-                  <a:lnTo>
-                    <a:pt x="3691610" y="658072"/>
-                  </a:lnTo>
-                  <a:lnTo>
-                    <a:pt x="3779506" y="641250"/>
-                  </a:lnTo>
-                  <a:lnTo>
-                    <a:pt x="3867401" y="624301"/>
-                  </a:lnTo>
-                  <a:lnTo>
-                    <a:pt x="3955297" y="607237"/>
-                  </a:lnTo>
-                  <a:lnTo>
-                    <a:pt x="4043192" y="590071"/>
-                  </a:lnTo>
-                  <a:lnTo>
-                    <a:pt x="4131088" y="572811"/>
-                  </a:lnTo>
-                  <a:lnTo>
-                    <a:pt x="4218983" y="555469"/>
-                  </a:lnTo>
-                  <a:lnTo>
-                    <a:pt x="4306879" y="538052"/>
-                  </a:lnTo>
-                  <a:lnTo>
-                    <a:pt x="4394774" y="520567"/>
-                  </a:lnTo>
-                  <a:lnTo>
-                    <a:pt x="4482670" y="503022"/>
-                  </a:lnTo>
-                  <a:lnTo>
-                    <a:pt x="4570565" y="485421"/>
-                  </a:lnTo>
-                  <a:lnTo>
-                    <a:pt x="4658461" y="467771"/>
-                  </a:lnTo>
-                  <a:lnTo>
-                    <a:pt x="4746356" y="450075"/>
-                  </a:lnTo>
-                  <a:lnTo>
-                    <a:pt x="4834252" y="432338"/>
-                  </a:lnTo>
-                  <a:lnTo>
-                    <a:pt x="4922147" y="414564"/>
-                  </a:lnTo>
-                  <a:lnTo>
-                    <a:pt x="5010043" y="396754"/>
-                  </a:lnTo>
-                  <a:lnTo>
-                    <a:pt x="5097938" y="378914"/>
-                  </a:lnTo>
-                  <a:lnTo>
-                    <a:pt x="5185834" y="361045"/>
-                  </a:lnTo>
-                  <a:lnTo>
-                    <a:pt x="5273729" y="343149"/>
-                  </a:lnTo>
-                  <a:lnTo>
-                    <a:pt x="5361625" y="325228"/>
-                  </a:lnTo>
-                  <a:lnTo>
-                    <a:pt x="5449520" y="307285"/>
-                  </a:lnTo>
-                  <a:lnTo>
-                    <a:pt x="5537416" y="289322"/>
-                  </a:lnTo>
-                  <a:lnTo>
-                    <a:pt x="5625311" y="271339"/>
-                  </a:lnTo>
-                  <a:lnTo>
-                    <a:pt x="5713207" y="253338"/>
-                  </a:lnTo>
-                  <a:lnTo>
-                    <a:pt x="5801102" y="235320"/>
-                  </a:lnTo>
-                  <a:lnTo>
-                    <a:pt x="5888998" y="217287"/>
-                  </a:lnTo>
-                  <a:lnTo>
-                    <a:pt x="5976893" y="199240"/>
-                  </a:lnTo>
-                  <a:lnTo>
-                    <a:pt x="6064789" y="181179"/>
-                  </a:lnTo>
-                  <a:lnTo>
-                    <a:pt x="6152684" y="163106"/>
-                  </a:lnTo>
-                  <a:lnTo>
-                    <a:pt x="6240580" y="145021"/>
-                  </a:lnTo>
-                  <a:lnTo>
-                    <a:pt x="6328475" y="126926"/>
-                  </a:lnTo>
-                  <a:lnTo>
-                    <a:pt x="6416371" y="108820"/>
-                  </a:lnTo>
-                  <a:lnTo>
-                    <a:pt x="6504266" y="90704"/>
-                  </a:lnTo>
-                  <a:lnTo>
-                    <a:pt x="6592162" y="72579"/>
-                  </a:lnTo>
-                  <a:lnTo>
-                    <a:pt x="6680057" y="54446"/>
-                  </a:lnTo>
-                  <a:lnTo>
-                    <a:pt x="6767953" y="36304"/>
-                  </a:lnTo>
-                  <a:lnTo>
-                    <a:pt x="6855848" y="18156"/>
+                    <a:pt x="87895" y="1158292"/>
+                  </a:lnTo>
+                  <a:lnTo>
+                    <a:pt x="175790" y="1149049"/>
+                  </a:lnTo>
+                  <a:lnTo>
+                    <a:pt x="263686" y="1139774"/>
+                  </a:lnTo>
+                  <a:lnTo>
+                    <a:pt x="351581" y="1130464"/>
+                  </a:lnTo>
+                  <a:lnTo>
+                    <a:pt x="439477" y="1121117"/>
+                  </a:lnTo>
+                  <a:lnTo>
+                    <a:pt x="527372" y="1111728"/>
+                  </a:lnTo>
+                  <a:lnTo>
+                    <a:pt x="615268" y="1102293"/>
+                  </a:lnTo>
+                  <a:lnTo>
+                    <a:pt x="703163" y="1092808"/>
+                  </a:lnTo>
+                  <a:lnTo>
+                    <a:pt x="791059" y="1083268"/>
+                  </a:lnTo>
+                  <a:lnTo>
+                    <a:pt x="878954" y="1073666"/>
+                  </a:lnTo>
+                  <a:lnTo>
+                    <a:pt x="966850" y="1063997"/>
+                  </a:lnTo>
+                  <a:lnTo>
+                    <a:pt x="1054745" y="1054252"/>
+                  </a:lnTo>
+                  <a:lnTo>
+                    <a:pt x="1142641" y="1044423"/>
+                  </a:lnTo>
+                  <a:lnTo>
+                    <a:pt x="1230536" y="1034501"/>
+                  </a:lnTo>
+                  <a:lnTo>
+                    <a:pt x="1318432" y="1024476"/>
+                  </a:lnTo>
+                  <a:lnTo>
+                    <a:pt x="1406327" y="1014335"/>
+                  </a:lnTo>
+                  <a:lnTo>
+                    <a:pt x="1494223" y="1004065"/>
+                  </a:lnTo>
+                  <a:lnTo>
+                    <a:pt x="1582118" y="993651"/>
+                  </a:lnTo>
+                  <a:lnTo>
+                    <a:pt x="1670014" y="983077"/>
+                  </a:lnTo>
+                  <a:lnTo>
+                    <a:pt x="1757909" y="972325"/>
+                  </a:lnTo>
+                  <a:lnTo>
+                    <a:pt x="1845805" y="961375"/>
+                  </a:lnTo>
+                  <a:lnTo>
+                    <a:pt x="1933700" y="950207"/>
+                  </a:lnTo>
+                  <a:lnTo>
+                    <a:pt x="2021596" y="938799"/>
+                  </a:lnTo>
+                  <a:lnTo>
+                    <a:pt x="2109491" y="927128"/>
+                  </a:lnTo>
+                  <a:lnTo>
+                    <a:pt x="2197387" y="915174"/>
+                  </a:lnTo>
+                  <a:lnTo>
+                    <a:pt x="2285282" y="902915"/>
+                  </a:lnTo>
+                  <a:lnTo>
+                    <a:pt x="2373178" y="890334"/>
+                  </a:lnTo>
+                  <a:lnTo>
+                    <a:pt x="2461073" y="877415"/>
+                  </a:lnTo>
+                  <a:lnTo>
+                    <a:pt x="2548969" y="864148"/>
+                  </a:lnTo>
+                  <a:lnTo>
+                    <a:pt x="2636864" y="850528"/>
+                  </a:lnTo>
+                  <a:lnTo>
+                    <a:pt x="2724760" y="836554"/>
+                  </a:lnTo>
+                  <a:lnTo>
+                    <a:pt x="2812655" y="822232"/>
+                  </a:lnTo>
+                  <a:lnTo>
+                    <a:pt x="2900551" y="807574"/>
+                  </a:lnTo>
+                  <a:lnTo>
+                    <a:pt x="2988446" y="792593"/>
+                  </a:lnTo>
+                  <a:lnTo>
+                    <a:pt x="3076342" y="777308"/>
+                  </a:lnTo>
+                  <a:lnTo>
+                    <a:pt x="3164237" y="761739"/>
+                  </a:lnTo>
+                  <a:lnTo>
+                    <a:pt x="3252133" y="745910"/>
+                  </a:lnTo>
+                  <a:lnTo>
+                    <a:pt x="3340028" y="729840"/>
+                  </a:lnTo>
+                  <a:lnTo>
+                    <a:pt x="3427924" y="713553"/>
+                  </a:lnTo>
+                  <a:lnTo>
+                    <a:pt x="3515819" y="697068"/>
+                  </a:lnTo>
+                  <a:lnTo>
+                    <a:pt x="3603715" y="680406"/>
+                  </a:lnTo>
+                  <a:lnTo>
+                    <a:pt x="3691610" y="663584"/>
+                  </a:lnTo>
+                  <a:lnTo>
+                    <a:pt x="3779506" y="646618"/>
+                  </a:lnTo>
+                  <a:lnTo>
+                    <a:pt x="3867401" y="629524"/>
+                  </a:lnTo>
+                  <a:lnTo>
+                    <a:pt x="3955297" y="612315"/>
+                  </a:lnTo>
+                  <a:lnTo>
+                    <a:pt x="4043192" y="595002"/>
+                  </a:lnTo>
+                  <a:lnTo>
+                    <a:pt x="4131088" y="577596"/>
+                  </a:lnTo>
+                  <a:lnTo>
+                    <a:pt x="4218983" y="560107"/>
+                  </a:lnTo>
+                  <a:lnTo>
+                    <a:pt x="4306879" y="542543"/>
+                  </a:lnTo>
+                  <a:lnTo>
+                    <a:pt x="4394774" y="524911"/>
+                  </a:lnTo>
+                  <a:lnTo>
+                    <a:pt x="4482670" y="507217"/>
+                  </a:lnTo>
+                  <a:lnTo>
+                    <a:pt x="4570565" y="489469"/>
+                  </a:lnTo>
+                  <a:lnTo>
+                    <a:pt x="4658461" y="471670"/>
+                  </a:lnTo>
+                  <a:lnTo>
+                    <a:pt x="4746356" y="453826"/>
+                  </a:lnTo>
+                  <a:lnTo>
+                    <a:pt x="4834252" y="435940"/>
+                  </a:lnTo>
+                  <a:lnTo>
+                    <a:pt x="4922147" y="418016"/>
+                  </a:lnTo>
+                  <a:lnTo>
+                    <a:pt x="5010043" y="400058"/>
+                  </a:lnTo>
+                  <a:lnTo>
+                    <a:pt x="5097938" y="382068"/>
+                  </a:lnTo>
+                  <a:lnTo>
+                    <a:pt x="5185834" y="364050"/>
+                  </a:lnTo>
+                  <a:lnTo>
+                    <a:pt x="5273729" y="346004"/>
+                  </a:lnTo>
+                  <a:lnTo>
+                    <a:pt x="5361625" y="327934"/>
+                  </a:lnTo>
+                  <a:lnTo>
+                    <a:pt x="5449520" y="309841"/>
+                  </a:lnTo>
+                  <a:lnTo>
+                    <a:pt x="5537416" y="291728"/>
+                  </a:lnTo>
+                  <a:lnTo>
+                    <a:pt x="5625311" y="273595"/>
+                  </a:lnTo>
+                  <a:lnTo>
+                    <a:pt x="5713207" y="255444"/>
+                  </a:lnTo>
+                  <a:lnTo>
+                    <a:pt x="5801102" y="237276"/>
+                  </a:lnTo>
+                  <a:lnTo>
+                    <a:pt x="5888998" y="219093"/>
+                  </a:lnTo>
+                  <a:lnTo>
+                    <a:pt x="5976893" y="200896"/>
+                  </a:lnTo>
+                  <a:lnTo>
+                    <a:pt x="6064789" y="182685"/>
+                  </a:lnTo>
+                  <a:lnTo>
+                    <a:pt x="6152684" y="164461"/>
+                  </a:lnTo>
+                  <a:lnTo>
+                    <a:pt x="6240580" y="146226"/>
+                  </a:lnTo>
+                  <a:lnTo>
+                    <a:pt x="6328475" y="127980"/>
+                  </a:lnTo>
+                  <a:lnTo>
+                    <a:pt x="6416371" y="109723"/>
+                  </a:lnTo>
+                  <a:lnTo>
+                    <a:pt x="6504266" y="91457"/>
+                  </a:lnTo>
+                  <a:lnTo>
+                    <a:pt x="6592162" y="73182"/>
+                  </a:lnTo>
+                  <a:lnTo>
+                    <a:pt x="6680057" y="54898"/>
+                  </a:lnTo>
+                  <a:lnTo>
+                    <a:pt x="6767953" y="36606"/>
+                  </a:lnTo>
+                  <a:lnTo>
+                    <a:pt x="6855848" y="18306"/>
                   </a:lnTo>
                   <a:lnTo>
                     <a:pt x="6943744" y="0"/>
                   </a:lnTo>
                   <a:lnTo>
-                    <a:pt x="6943744" y="501683"/>
-                  </a:lnTo>
-                  <a:lnTo>
-                    <a:pt x="6855848" y="510443"/>
-                  </a:lnTo>
-                  <a:lnTo>
-                    <a:pt x="6767953" y="519210"/>
-                  </a:lnTo>
-                  <a:lnTo>
-                    <a:pt x="6680057" y="527984"/>
-                  </a:lnTo>
-                  <a:lnTo>
-                    <a:pt x="6592162" y="536767"/>
-                  </a:lnTo>
-                  <a:lnTo>
-                    <a:pt x="6504266" y="545558"/>
-                  </a:lnTo>
-                  <a:lnTo>
-                    <a:pt x="6416371" y="554359"/>
-                  </a:lnTo>
-                  <a:lnTo>
-                    <a:pt x="6328475" y="563168"/>
-                  </a:lnTo>
-                  <a:lnTo>
-                    <a:pt x="6240580" y="571989"/>
-                  </a:lnTo>
-                  <a:lnTo>
-                    <a:pt x="6152684" y="580820"/>
-                  </a:lnTo>
-                  <a:lnTo>
-                    <a:pt x="6064789" y="589663"/>
-                  </a:lnTo>
-                  <a:lnTo>
-                    <a:pt x="5976893" y="598518"/>
-                  </a:lnTo>
-                  <a:lnTo>
-                    <a:pt x="5888998" y="607387"/>
-                  </a:lnTo>
-                  <a:lnTo>
-                    <a:pt x="5801102" y="616270"/>
-                  </a:lnTo>
-                  <a:lnTo>
-                    <a:pt x="5713207" y="625168"/>
-                  </a:lnTo>
-                  <a:lnTo>
-                    <a:pt x="5625311" y="634083"/>
-                  </a:lnTo>
-                  <a:lnTo>
-                    <a:pt x="5537416" y="643016"/>
-                  </a:lnTo>
-                  <a:lnTo>
-                    <a:pt x="5449520" y="651968"/>
-                  </a:lnTo>
-                  <a:lnTo>
-                    <a:pt x="5361625" y="660942"/>
-                  </a:lnTo>
-                  <a:lnTo>
-                    <a:pt x="5273729" y="669937"/>
-                  </a:lnTo>
-                  <a:lnTo>
-                    <a:pt x="5185834" y="678957"/>
-                  </a:lnTo>
-                  <a:lnTo>
-                    <a:pt x="5097938" y="688004"/>
-                  </a:lnTo>
-                  <a:lnTo>
-                    <a:pt x="5010043" y="697079"/>
-                  </a:lnTo>
-                  <a:lnTo>
-                    <a:pt x="4922147" y="706186"/>
-                  </a:lnTo>
-                  <a:lnTo>
-                    <a:pt x="4834252" y="715327"/>
-                  </a:lnTo>
-                  <a:lnTo>
-                    <a:pt x="4746356" y="724506"/>
-                  </a:lnTo>
-                  <a:lnTo>
-                    <a:pt x="4658461" y="733727"/>
-                  </a:lnTo>
-                  <a:lnTo>
-                    <a:pt x="4570565" y="742992"/>
-                  </a:lnTo>
-                  <a:lnTo>
-                    <a:pt x="4482670" y="752308"/>
-                  </a:lnTo>
-                  <a:lnTo>
-                    <a:pt x="4394774" y="761678"/>
-                  </a:lnTo>
-                  <a:lnTo>
-                    <a:pt x="4306879" y="771110"/>
-                  </a:lnTo>
-                  <a:lnTo>
-                    <a:pt x="4218983" y="780609"/>
-                  </a:lnTo>
-                  <a:lnTo>
-                    <a:pt x="4131088" y="790182"/>
-                  </a:lnTo>
-                  <a:lnTo>
-                    <a:pt x="4043192" y="799839"/>
-                  </a:lnTo>
-                  <a:lnTo>
-                    <a:pt x="3955297" y="809588"/>
-                  </a:lnTo>
-                  <a:lnTo>
-                    <a:pt x="3867401" y="819440"/>
-                  </a:lnTo>
-                  <a:lnTo>
-                    <a:pt x="3779506" y="829407"/>
-                  </a:lnTo>
-                  <a:lnTo>
-                    <a:pt x="3691610" y="839502"/>
-                  </a:lnTo>
-                  <a:lnTo>
-                    <a:pt x="3603715" y="849739"/>
-                  </a:lnTo>
-                  <a:lnTo>
-                    <a:pt x="3515819" y="860136"/>
-                  </a:lnTo>
-                  <a:lnTo>
-                    <a:pt x="3427924" y="870710"/>
-                  </a:lnTo>
-                  <a:lnTo>
-                    <a:pt x="3340028" y="881481"/>
-                  </a:lnTo>
-                  <a:lnTo>
-                    <a:pt x="3252133" y="892469"/>
-                  </a:lnTo>
-                  <a:lnTo>
-                    <a:pt x="3164237" y="903696"/>
-                  </a:lnTo>
-                  <a:lnTo>
-                    <a:pt x="3076342" y="915184"/>
-                  </a:lnTo>
-                  <a:lnTo>
-                    <a:pt x="2988446" y="926955"/>
-                  </a:lnTo>
-                  <a:lnTo>
-                    <a:pt x="2900551" y="939030"/>
-                  </a:lnTo>
-                  <a:lnTo>
-                    <a:pt x="2812655" y="951427"/>
-                  </a:lnTo>
-                  <a:lnTo>
-                    <a:pt x="2724760" y="964161"/>
-                  </a:lnTo>
-                  <a:lnTo>
-                    <a:pt x="2636864" y="977244"/>
-                  </a:lnTo>
-                  <a:lnTo>
-                    <a:pt x="2548969" y="990682"/>
-                  </a:lnTo>
-                  <a:lnTo>
-                    <a:pt x="2461073" y="1004474"/>
-                  </a:lnTo>
-                  <a:lnTo>
-                    <a:pt x="2373178" y="1018616"/>
-                  </a:lnTo>
-                  <a:lnTo>
-                    <a:pt x="2285282" y="1033096"/>
-                  </a:lnTo>
-                  <a:lnTo>
-                    <a:pt x="2197387" y="1047901"/>
-                  </a:lnTo>
-                  <a:lnTo>
-                    <a:pt x="2109491" y="1063012"/>
-                  </a:lnTo>
-                  <a:lnTo>
-                    <a:pt x="2021596" y="1078408"/>
-                  </a:lnTo>
-                  <a:lnTo>
-                    <a:pt x="1933700" y="1094068"/>
-                  </a:lnTo>
-                  <a:lnTo>
-                    <a:pt x="1845805" y="1109970"/>
-                  </a:lnTo>
-                  <a:lnTo>
-                    <a:pt x="1757909" y="1126091"/>
-                  </a:lnTo>
-                  <a:lnTo>
-                    <a:pt x="1670014" y="1142412"/>
-                  </a:lnTo>
-                  <a:lnTo>
-                    <a:pt x="1582118" y="1158911"/>
-                  </a:lnTo>
-                  <a:lnTo>
-                    <a:pt x="1494223" y="1175572"/>
-                  </a:lnTo>
-                  <a:lnTo>
-                    <a:pt x="1406327" y="1192377"/>
-                  </a:lnTo>
-                  <a:lnTo>
-                    <a:pt x="1318432" y="1209312"/>
-                  </a:lnTo>
-                  <a:lnTo>
-                    <a:pt x="1230536" y="1226364"/>
-                  </a:lnTo>
-                  <a:lnTo>
-                    <a:pt x="1142641" y="1243519"/>
-                  </a:lnTo>
-                  <a:lnTo>
-                    <a:pt x="1054745" y="1260768"/>
-                  </a:lnTo>
-                  <a:lnTo>
-                    <a:pt x="966850" y="1278102"/>
-                  </a:lnTo>
-                  <a:lnTo>
-                    <a:pt x="878954" y="1295510"/>
-                  </a:lnTo>
-                  <a:lnTo>
-                    <a:pt x="791059" y="1312988"/>
-                  </a:lnTo>
-                  <a:lnTo>
-                    <a:pt x="703163" y="1330526"/>
-                  </a:lnTo>
-                  <a:lnTo>
-                    <a:pt x="615268" y="1348121"/>
-                  </a:lnTo>
-                  <a:lnTo>
-                    <a:pt x="527372" y="1365766"/>
-                  </a:lnTo>
-                  <a:lnTo>
-                    <a:pt x="439477" y="1383456"/>
-                  </a:lnTo>
-                  <a:lnTo>
-                    <a:pt x="351581" y="1401189"/>
-                  </a:lnTo>
-                  <a:lnTo>
-                    <a:pt x="263686" y="1418959"/>
-                  </a:lnTo>
-                  <a:lnTo>
-                    <a:pt x="175790" y="1436764"/>
-                  </a:lnTo>
-                  <a:lnTo>
-                    <a:pt x="87895" y="1454601"/>
-                  </a:lnTo>
-                  <a:lnTo>
-                    <a:pt x="0" y="1472468"/>
+                    <a:pt x="6943744" y="500606"/>
+                  </a:lnTo>
+                  <a:lnTo>
+                    <a:pt x="6855848" y="509531"/>
+                  </a:lnTo>
+                  <a:lnTo>
+                    <a:pt x="6767953" y="518464"/>
+                  </a:lnTo>
+                  <a:lnTo>
+                    <a:pt x="6680057" y="527404"/>
+                  </a:lnTo>
+                  <a:lnTo>
+                    <a:pt x="6592162" y="536352"/>
+                  </a:lnTo>
+                  <a:lnTo>
+                    <a:pt x="6504266" y="545309"/>
+                  </a:lnTo>
+                  <a:lnTo>
+                    <a:pt x="6416371" y="554275"/>
+                  </a:lnTo>
+                  <a:lnTo>
+                    <a:pt x="6328475" y="563251"/>
+                  </a:lnTo>
+                  <a:lnTo>
+                    <a:pt x="6240580" y="572237"/>
+                  </a:lnTo>
+                  <a:lnTo>
+                    <a:pt x="6152684" y="581234"/>
+                  </a:lnTo>
+                  <a:lnTo>
+                    <a:pt x="6064789" y="590243"/>
+                  </a:lnTo>
+                  <a:lnTo>
+                    <a:pt x="5976893" y="599264"/>
+                  </a:lnTo>
+                  <a:lnTo>
+                    <a:pt x="5888998" y="608299"/>
+                  </a:lnTo>
+                  <a:lnTo>
+                    <a:pt x="5801102" y="617348"/>
+                  </a:lnTo>
+                  <a:lnTo>
+                    <a:pt x="5713207" y="626413"/>
+                  </a:lnTo>
+                  <a:lnTo>
+                    <a:pt x="5625311" y="635494"/>
+                  </a:lnTo>
+                  <a:lnTo>
+                    <a:pt x="5537416" y="644593"/>
+                  </a:lnTo>
+                  <a:lnTo>
+                    <a:pt x="5449520" y="653712"/>
+                  </a:lnTo>
+                  <a:lnTo>
+                    <a:pt x="5361625" y="662852"/>
+                  </a:lnTo>
+                  <a:lnTo>
+                    <a:pt x="5273729" y="672014"/>
+                  </a:lnTo>
+                  <a:lnTo>
+                    <a:pt x="5185834" y="681201"/>
+                  </a:lnTo>
+                  <a:lnTo>
+                    <a:pt x="5097938" y="690414"/>
+                  </a:lnTo>
+                  <a:lnTo>
+                    <a:pt x="5010043" y="699656"/>
+                  </a:lnTo>
+                  <a:lnTo>
+                    <a:pt x="4922147" y="708931"/>
+                  </a:lnTo>
+                  <a:lnTo>
+                    <a:pt x="4834252" y="718239"/>
+                  </a:lnTo>
+                  <a:lnTo>
+                    <a:pt x="4746356" y="727586"/>
+                  </a:lnTo>
+                  <a:lnTo>
+                    <a:pt x="4658461" y="736974"/>
+                  </a:lnTo>
+                  <a:lnTo>
+                    <a:pt x="4570565" y="746407"/>
+                  </a:lnTo>
+                  <a:lnTo>
+                    <a:pt x="4482670" y="755891"/>
+                  </a:lnTo>
+                  <a:lnTo>
+                    <a:pt x="4394774" y="765430"/>
+                  </a:lnTo>
+                  <a:lnTo>
+                    <a:pt x="4306879" y="775030"/>
+                  </a:lnTo>
+                  <a:lnTo>
+                    <a:pt x="4218983" y="784698"/>
+                  </a:lnTo>
+                  <a:lnTo>
+                    <a:pt x="4131088" y="794441"/>
+                  </a:lnTo>
+                  <a:lnTo>
+                    <a:pt x="4043192" y="804268"/>
+                  </a:lnTo>
+                  <a:lnTo>
+                    <a:pt x="3955297" y="814187"/>
+                  </a:lnTo>
+                  <a:lnTo>
+                    <a:pt x="3867401" y="824210"/>
+                  </a:lnTo>
+                  <a:lnTo>
+                    <a:pt x="3779506" y="834348"/>
+                  </a:lnTo>
+                  <a:lnTo>
+                    <a:pt x="3691610" y="844615"/>
+                  </a:lnTo>
+                  <a:lnTo>
+                    <a:pt x="3603715" y="855025"/>
+                  </a:lnTo>
+                  <a:lnTo>
+                    <a:pt x="3515819" y="865595"/>
+                  </a:lnTo>
+                  <a:lnTo>
+                    <a:pt x="3427924" y="876343"/>
+                  </a:lnTo>
+                  <a:lnTo>
+                    <a:pt x="3340028" y="887287"/>
+                  </a:lnTo>
+                  <a:lnTo>
+                    <a:pt x="3252133" y="898450"/>
+                  </a:lnTo>
+                  <a:lnTo>
+                    <a:pt x="3164237" y="909853"/>
+                  </a:lnTo>
+                  <a:lnTo>
+                    <a:pt x="3076342" y="921517"/>
+                  </a:lnTo>
+                  <a:lnTo>
+                    <a:pt x="2988446" y="933464"/>
+                  </a:lnTo>
+                  <a:lnTo>
+                    <a:pt x="2900551" y="945715"/>
+                  </a:lnTo>
+                  <a:lnTo>
+                    <a:pt x="2812655" y="958289"/>
+                  </a:lnTo>
+                  <a:lnTo>
+                    <a:pt x="2724760" y="971199"/>
+                  </a:lnTo>
+                  <a:lnTo>
+                    <a:pt x="2636864" y="984458"/>
+                  </a:lnTo>
+                  <a:lnTo>
+                    <a:pt x="2548969" y="998070"/>
+                  </a:lnTo>
+                  <a:lnTo>
+                    <a:pt x="2461073" y="1012035"/>
+                  </a:lnTo>
+                  <a:lnTo>
+                    <a:pt x="2373178" y="1026349"/>
+                  </a:lnTo>
+                  <a:lnTo>
+                    <a:pt x="2285282" y="1040999"/>
+                  </a:lnTo>
+                  <a:lnTo>
+                    <a:pt x="2197387" y="1055973"/>
+                  </a:lnTo>
+                  <a:lnTo>
+                    <a:pt x="2109491" y="1071251"/>
+                  </a:lnTo>
+                  <a:lnTo>
+                    <a:pt x="2021596" y="1086813"/>
+                  </a:lnTo>
+                  <a:lnTo>
+                    <a:pt x="1933700" y="1102637"/>
+                  </a:lnTo>
+                  <a:lnTo>
+                    <a:pt x="1845805" y="1118701"/>
+                  </a:lnTo>
+                  <a:lnTo>
+                    <a:pt x="1757909" y="1134983"/>
+                  </a:lnTo>
+                  <a:lnTo>
+                    <a:pt x="1670014" y="1151463"/>
+                  </a:lnTo>
+                  <a:lnTo>
+                    <a:pt x="1582118" y="1168121"/>
+                  </a:lnTo>
+                  <a:lnTo>
+                    <a:pt x="1494223" y="1184940"/>
+                  </a:lnTo>
+                  <a:lnTo>
+                    <a:pt x="1406327" y="1201902"/>
+                  </a:lnTo>
+                  <a:lnTo>
+                    <a:pt x="1318432" y="1218993"/>
+                  </a:lnTo>
+                  <a:lnTo>
+                    <a:pt x="1230536" y="1236200"/>
+                  </a:lnTo>
+                  <a:lnTo>
+                    <a:pt x="1142641" y="1253511"/>
+                  </a:lnTo>
+                  <a:lnTo>
+                    <a:pt x="1054745" y="1270915"/>
+                  </a:lnTo>
+                  <a:lnTo>
+                    <a:pt x="966850" y="1288402"/>
+                  </a:lnTo>
+                  <a:lnTo>
+                    <a:pt x="878954" y="1305964"/>
+                  </a:lnTo>
+                  <a:lnTo>
+                    <a:pt x="791059" y="1323595"/>
+                  </a:lnTo>
+                  <a:lnTo>
+                    <a:pt x="703163" y="1341287"/>
+                  </a:lnTo>
+                  <a:lnTo>
+                    <a:pt x="615268" y="1359034"/>
+                  </a:lnTo>
+                  <a:lnTo>
+                    <a:pt x="527372" y="1376832"/>
+                  </a:lnTo>
+                  <a:lnTo>
+                    <a:pt x="439477" y="1394675"/>
+                  </a:lnTo>
+                  <a:lnTo>
+                    <a:pt x="351581" y="1412560"/>
+                  </a:lnTo>
+                  <a:lnTo>
+                    <a:pt x="263686" y="1430483"/>
+                  </a:lnTo>
+                  <a:lnTo>
+                    <a:pt x="175790" y="1448440"/>
+                  </a:lnTo>
+                  <a:lnTo>
+                    <a:pt x="87895" y="1466429"/>
+                  </a:lnTo>
+                  <a:lnTo>
+                    <a:pt x="0" y="1484447"/>
                   </a:lnTo>
                   <a:close/>
                 </a:path>
@@ -10243,255 +10208,255 @@
         </p:sp>
         <p:sp>
           <p:nvSpPr>
-            <p:cNvPr id="214" name="pl214"/>
-            <p:cNvSpPr/>
-            <p:nvPr/>
-          </p:nvSpPr>
-          <p:spPr>
-            <a:xfrm>
-              <a:off x="1326279" y="3588658"/>
-              <a:ext cx="6943744" cy="1155577"/>
+            <p:cNvPr id="213" name="pl213"/>
+            <p:cNvSpPr/>
+            <p:nvPr/>
+          </p:nvSpPr>
+          <p:spPr>
+            <a:xfrm>
+              <a:off x="1326279" y="3584791"/>
+              <a:ext cx="6943744" cy="1167506"/>
             </a:xfrm>
             <a:custGeom>
               <a:avLst/>
               <a:pathLst>
-                <a:path w="6943744" h="1155577">
+                <a:path w="6943744" h="1167506">
                   <a:moveTo>
-                    <a:pt x="0" y="1155577"/>
+                    <a:pt x="0" y="1167506"/>
                   </a:moveTo>
                   <a:lnTo>
-                    <a:pt x="87895" y="1146527"/>
-                  </a:lnTo>
-                  <a:lnTo>
-                    <a:pt x="175790" y="1137448"/>
-                  </a:lnTo>
-                  <a:lnTo>
-                    <a:pt x="263686" y="1128337"/>
-                  </a:lnTo>
-                  <a:lnTo>
-                    <a:pt x="351581" y="1119192"/>
-                  </a:lnTo>
-                  <a:lnTo>
-                    <a:pt x="439477" y="1110008"/>
-                  </a:lnTo>
-                  <a:lnTo>
-                    <a:pt x="527372" y="1100783"/>
-                  </a:lnTo>
-                  <a:lnTo>
-                    <a:pt x="615268" y="1091512"/>
-                  </a:lnTo>
-                  <a:lnTo>
-                    <a:pt x="703163" y="1082190"/>
-                  </a:lnTo>
-                  <a:lnTo>
-                    <a:pt x="791059" y="1072813"/>
-                  </a:lnTo>
-                  <a:lnTo>
-                    <a:pt x="878954" y="1063374"/>
-                  </a:lnTo>
-                  <a:lnTo>
-                    <a:pt x="966850" y="1053867"/>
-                  </a:lnTo>
-                  <a:lnTo>
-                    <a:pt x="1054745" y="1044284"/>
-                  </a:lnTo>
-                  <a:lnTo>
-                    <a:pt x="1142641" y="1034617"/>
-                  </a:lnTo>
-                  <a:lnTo>
-                    <a:pt x="1230536" y="1024857"/>
-                  </a:lnTo>
-                  <a:lnTo>
-                    <a:pt x="1318432" y="1014992"/>
-                  </a:lnTo>
-                  <a:lnTo>
-                    <a:pt x="1406327" y="1005011"/>
-                  </a:lnTo>
-                  <a:lnTo>
-                    <a:pt x="1494223" y="994901"/>
-                  </a:lnTo>
-                  <a:lnTo>
-                    <a:pt x="1582118" y="984645"/>
-                  </a:lnTo>
-                  <a:lnTo>
-                    <a:pt x="1670014" y="974229"/>
-                  </a:lnTo>
-                  <a:lnTo>
-                    <a:pt x="1757909" y="963633"/>
-                  </a:lnTo>
-                  <a:lnTo>
-                    <a:pt x="1845805" y="952839"/>
-                  </a:lnTo>
-                  <a:lnTo>
-                    <a:pt x="1933700" y="941824"/>
-                  </a:lnTo>
-                  <a:lnTo>
-                    <a:pt x="2021596" y="930569"/>
-                  </a:lnTo>
-                  <a:lnTo>
-                    <a:pt x="2109491" y="919049"/>
-                  </a:lnTo>
-                  <a:lnTo>
-                    <a:pt x="2197387" y="907244"/>
-                  </a:lnTo>
-                  <a:lnTo>
-                    <a:pt x="2285282" y="895133"/>
-                  </a:lnTo>
-                  <a:lnTo>
-                    <a:pt x="2373178" y="882697"/>
-                  </a:lnTo>
-                  <a:lnTo>
-                    <a:pt x="2461073" y="869923"/>
-                  </a:lnTo>
-                  <a:lnTo>
-                    <a:pt x="2548969" y="856799"/>
-                  </a:lnTo>
-                  <a:lnTo>
-                    <a:pt x="2636864" y="843321"/>
-                  </a:lnTo>
-                  <a:lnTo>
-                    <a:pt x="2724760" y="829488"/>
-                  </a:lnTo>
-                  <a:lnTo>
-                    <a:pt x="2812655" y="815306"/>
-                  </a:lnTo>
-                  <a:lnTo>
-                    <a:pt x="2900551" y="800788"/>
-                  </a:lnTo>
-                  <a:lnTo>
-                    <a:pt x="2988446" y="785946"/>
-                  </a:lnTo>
-                  <a:lnTo>
-                    <a:pt x="3076342" y="770801"/>
-                  </a:lnTo>
-                  <a:lnTo>
-                    <a:pt x="3164237" y="755373"/>
-                  </a:lnTo>
-                  <a:lnTo>
-                    <a:pt x="3252133" y="739684"/>
-                  </a:lnTo>
-                  <a:lnTo>
-                    <a:pt x="3340028" y="723756"/>
-                  </a:lnTo>
-                  <a:lnTo>
-                    <a:pt x="3427924" y="707611"/>
-                  </a:lnTo>
-                  <a:lnTo>
-                    <a:pt x="3515819" y="691269"/>
-                  </a:lnTo>
-                  <a:lnTo>
-                    <a:pt x="3603715" y="674750"/>
-                  </a:lnTo>
-                  <a:lnTo>
-                    <a:pt x="3691610" y="658072"/>
-                  </a:lnTo>
-                  <a:lnTo>
-                    <a:pt x="3779506" y="641250"/>
-                  </a:lnTo>
-                  <a:lnTo>
-                    <a:pt x="3867401" y="624301"/>
-                  </a:lnTo>
-                  <a:lnTo>
-                    <a:pt x="3955297" y="607237"/>
-                  </a:lnTo>
-                  <a:lnTo>
-                    <a:pt x="4043192" y="590071"/>
-                  </a:lnTo>
-                  <a:lnTo>
-                    <a:pt x="4131088" y="572811"/>
-                  </a:lnTo>
-                  <a:lnTo>
-                    <a:pt x="4218983" y="555469"/>
-                  </a:lnTo>
-                  <a:lnTo>
-                    <a:pt x="4306879" y="538052"/>
-                  </a:lnTo>
-                  <a:lnTo>
-                    <a:pt x="4394774" y="520567"/>
-                  </a:lnTo>
-                  <a:lnTo>
-                    <a:pt x="4482670" y="503022"/>
-                  </a:lnTo>
-                  <a:lnTo>
-                    <a:pt x="4570565" y="485421"/>
-                  </a:lnTo>
-                  <a:lnTo>
-                    <a:pt x="4658461" y="467771"/>
-                  </a:lnTo>
-                  <a:lnTo>
-                    <a:pt x="4746356" y="450075"/>
-                  </a:lnTo>
-                  <a:lnTo>
-                    <a:pt x="4834252" y="432338"/>
-                  </a:lnTo>
-                  <a:lnTo>
-                    <a:pt x="4922147" y="414564"/>
-                  </a:lnTo>
-                  <a:lnTo>
-                    <a:pt x="5010043" y="396754"/>
-                  </a:lnTo>
-                  <a:lnTo>
-                    <a:pt x="5097938" y="378914"/>
-                  </a:lnTo>
-                  <a:lnTo>
-                    <a:pt x="5185834" y="361045"/>
-                  </a:lnTo>
-                  <a:lnTo>
-                    <a:pt x="5273729" y="343149"/>
-                  </a:lnTo>
-                  <a:lnTo>
-                    <a:pt x="5361625" y="325228"/>
-                  </a:lnTo>
-                  <a:lnTo>
-                    <a:pt x="5449520" y="307285"/>
-                  </a:lnTo>
-                  <a:lnTo>
-                    <a:pt x="5537416" y="289322"/>
-                  </a:lnTo>
-                  <a:lnTo>
-                    <a:pt x="5625311" y="271339"/>
-                  </a:lnTo>
-                  <a:lnTo>
-                    <a:pt x="5713207" y="253338"/>
-                  </a:lnTo>
-                  <a:lnTo>
-                    <a:pt x="5801102" y="235320"/>
-                  </a:lnTo>
-                  <a:lnTo>
-                    <a:pt x="5888998" y="217287"/>
-                  </a:lnTo>
-                  <a:lnTo>
-                    <a:pt x="5976893" y="199240"/>
-                  </a:lnTo>
-                  <a:lnTo>
-                    <a:pt x="6064789" y="181179"/>
-                  </a:lnTo>
-                  <a:lnTo>
-                    <a:pt x="6152684" y="163106"/>
-                  </a:lnTo>
-                  <a:lnTo>
-                    <a:pt x="6240580" y="145021"/>
-                  </a:lnTo>
-                  <a:lnTo>
-                    <a:pt x="6328475" y="126926"/>
-                  </a:lnTo>
-                  <a:lnTo>
-                    <a:pt x="6416371" y="108820"/>
-                  </a:lnTo>
-                  <a:lnTo>
-                    <a:pt x="6504266" y="90704"/>
-                  </a:lnTo>
-                  <a:lnTo>
-                    <a:pt x="6592162" y="72579"/>
-                  </a:lnTo>
-                  <a:lnTo>
-                    <a:pt x="6680057" y="54446"/>
-                  </a:lnTo>
-                  <a:lnTo>
-                    <a:pt x="6767953" y="36304"/>
-                  </a:lnTo>
-                  <a:lnTo>
-                    <a:pt x="6855848" y="18156"/>
+                    <a:pt x="87895" y="1158292"/>
+                  </a:lnTo>
+                  <a:lnTo>
+                    <a:pt x="175790" y="1149049"/>
+                  </a:lnTo>
+                  <a:lnTo>
+                    <a:pt x="263686" y="1139774"/>
+                  </a:lnTo>
+                  <a:lnTo>
+                    <a:pt x="351581" y="1130464"/>
+                  </a:lnTo>
+                  <a:lnTo>
+                    <a:pt x="439477" y="1121117"/>
+                  </a:lnTo>
+                  <a:lnTo>
+                    <a:pt x="527372" y="1111728"/>
+                  </a:lnTo>
+                  <a:lnTo>
+                    <a:pt x="615268" y="1102293"/>
+                  </a:lnTo>
+                  <a:lnTo>
+                    <a:pt x="703163" y="1092808"/>
+                  </a:lnTo>
+                  <a:lnTo>
+                    <a:pt x="791059" y="1083268"/>
+                  </a:lnTo>
+                  <a:lnTo>
+                    <a:pt x="878954" y="1073666"/>
+                  </a:lnTo>
+                  <a:lnTo>
+                    <a:pt x="966850" y="1063997"/>
+                  </a:lnTo>
+                  <a:lnTo>
+                    <a:pt x="1054745" y="1054252"/>
+                  </a:lnTo>
+                  <a:lnTo>
+                    <a:pt x="1142641" y="1044423"/>
+                  </a:lnTo>
+                  <a:lnTo>
+                    <a:pt x="1230536" y="1034501"/>
+                  </a:lnTo>
+                  <a:lnTo>
+                    <a:pt x="1318432" y="1024476"/>
+                  </a:lnTo>
+                  <a:lnTo>
+                    <a:pt x="1406327" y="1014335"/>
+                  </a:lnTo>
+                  <a:lnTo>
+                    <a:pt x="1494223" y="1004065"/>
+                  </a:lnTo>
+                  <a:lnTo>
+                    <a:pt x="1582118" y="993651"/>
+                  </a:lnTo>
+                  <a:lnTo>
+                    <a:pt x="1670014" y="983077"/>
+                  </a:lnTo>
+                  <a:lnTo>
+                    <a:pt x="1757909" y="972325"/>
+                  </a:lnTo>
+                  <a:lnTo>
+                    <a:pt x="1845805" y="961375"/>
+                  </a:lnTo>
+                  <a:lnTo>
+                    <a:pt x="1933700" y="950207"/>
+                  </a:lnTo>
+                  <a:lnTo>
+                    <a:pt x="2021596" y="938799"/>
+                  </a:lnTo>
+                  <a:lnTo>
+                    <a:pt x="2109491" y="927128"/>
+                  </a:lnTo>
+                  <a:lnTo>
+                    <a:pt x="2197387" y="915174"/>
+                  </a:lnTo>
+                  <a:lnTo>
+                    <a:pt x="2285282" y="902915"/>
+                  </a:lnTo>
+                  <a:lnTo>
+                    <a:pt x="2373178" y="890334"/>
+                  </a:lnTo>
+                  <a:lnTo>
+                    <a:pt x="2461073" y="877415"/>
+                  </a:lnTo>
+                  <a:lnTo>
+                    <a:pt x="2548969" y="864148"/>
+                  </a:lnTo>
+                  <a:lnTo>
+                    <a:pt x="2636864" y="850528"/>
+                  </a:lnTo>
+                  <a:lnTo>
+                    <a:pt x="2724760" y="836554"/>
+                  </a:lnTo>
+                  <a:lnTo>
+                    <a:pt x="2812655" y="822232"/>
+                  </a:lnTo>
+                  <a:lnTo>
+                    <a:pt x="2900551" y="807574"/>
+                  </a:lnTo>
+                  <a:lnTo>
+                    <a:pt x="2988446" y="792593"/>
+                  </a:lnTo>
+                  <a:lnTo>
+                    <a:pt x="3076342" y="777308"/>
+                  </a:lnTo>
+                  <a:lnTo>
+                    <a:pt x="3164237" y="761739"/>
+                  </a:lnTo>
+                  <a:lnTo>
+                    <a:pt x="3252133" y="745910"/>
+                  </a:lnTo>
+                  <a:lnTo>
+                    <a:pt x="3340028" y="729840"/>
+                  </a:lnTo>
+                  <a:lnTo>
+                    <a:pt x="3427924" y="713553"/>
+                  </a:lnTo>
+                  <a:lnTo>
+                    <a:pt x="3515819" y="697068"/>
+                  </a:lnTo>
+                  <a:lnTo>
+                    <a:pt x="3603715" y="680406"/>
+                  </a:lnTo>
+                  <a:lnTo>
+                    <a:pt x="3691610" y="663584"/>
+                  </a:lnTo>
+                  <a:lnTo>
+                    <a:pt x="3779506" y="646618"/>
+                  </a:lnTo>
+                  <a:lnTo>
+                    <a:pt x="3867401" y="629524"/>
+                  </a:lnTo>
+                  <a:lnTo>
+                    <a:pt x="3955297" y="612315"/>
+                  </a:lnTo>
+                  <a:lnTo>
+                    <a:pt x="4043192" y="595002"/>
+                  </a:lnTo>
+                  <a:lnTo>
+                    <a:pt x="4131088" y="577596"/>
+                  </a:lnTo>
+                  <a:lnTo>
+                    <a:pt x="4218983" y="560107"/>
+                  </a:lnTo>
+                  <a:lnTo>
+                    <a:pt x="4306879" y="542543"/>
+                  </a:lnTo>
+                  <a:lnTo>
+                    <a:pt x="4394774" y="524911"/>
+                  </a:lnTo>
+                  <a:lnTo>
+                    <a:pt x="4482670" y="507217"/>
+                  </a:lnTo>
+                  <a:lnTo>
+                    <a:pt x="4570565" y="489469"/>
+                  </a:lnTo>
+                  <a:lnTo>
+                    <a:pt x="4658461" y="471670"/>
+                  </a:lnTo>
+                  <a:lnTo>
+                    <a:pt x="4746356" y="453826"/>
+                  </a:lnTo>
+                  <a:lnTo>
+                    <a:pt x="4834252" y="435940"/>
+                  </a:lnTo>
+                  <a:lnTo>
+                    <a:pt x="4922147" y="418016"/>
+                  </a:lnTo>
+                  <a:lnTo>
+                    <a:pt x="5010043" y="400058"/>
+                  </a:lnTo>
+                  <a:lnTo>
+                    <a:pt x="5097938" y="382068"/>
+                  </a:lnTo>
+                  <a:lnTo>
+                    <a:pt x="5185834" y="364050"/>
+                  </a:lnTo>
+                  <a:lnTo>
+                    <a:pt x="5273729" y="346004"/>
+                  </a:lnTo>
+                  <a:lnTo>
+                    <a:pt x="5361625" y="327934"/>
+                  </a:lnTo>
+                  <a:lnTo>
+                    <a:pt x="5449520" y="309841"/>
+                  </a:lnTo>
+                  <a:lnTo>
+                    <a:pt x="5537416" y="291728"/>
+                  </a:lnTo>
+                  <a:lnTo>
+                    <a:pt x="5625311" y="273595"/>
+                  </a:lnTo>
+                  <a:lnTo>
+                    <a:pt x="5713207" y="255444"/>
+                  </a:lnTo>
+                  <a:lnTo>
+                    <a:pt x="5801102" y="237276"/>
+                  </a:lnTo>
+                  <a:lnTo>
+                    <a:pt x="5888998" y="219093"/>
+                  </a:lnTo>
+                  <a:lnTo>
+                    <a:pt x="5976893" y="200896"/>
+                  </a:lnTo>
+                  <a:lnTo>
+                    <a:pt x="6064789" y="182685"/>
+                  </a:lnTo>
+                  <a:lnTo>
+                    <a:pt x="6152684" y="164461"/>
+                  </a:lnTo>
+                  <a:lnTo>
+                    <a:pt x="6240580" y="146226"/>
+                  </a:lnTo>
+                  <a:lnTo>
+                    <a:pt x="6328475" y="127980"/>
+                  </a:lnTo>
+                  <a:lnTo>
+                    <a:pt x="6416371" y="109723"/>
+                  </a:lnTo>
+                  <a:lnTo>
+                    <a:pt x="6504266" y="91457"/>
+                  </a:lnTo>
+                  <a:lnTo>
+                    <a:pt x="6592162" y="73182"/>
+                  </a:lnTo>
+                  <a:lnTo>
+                    <a:pt x="6680057" y="54898"/>
+                  </a:lnTo>
+                  <a:lnTo>
+                    <a:pt x="6767953" y="36606"/>
+                  </a:lnTo>
+                  <a:lnTo>
+                    <a:pt x="6855848" y="18306"/>
                   </a:lnTo>
                   <a:lnTo>
                     <a:pt x="6943744" y="0"/>
@@ -10508,258 +10473,258 @@
         </p:sp>
         <p:sp>
           <p:nvSpPr>
-            <p:cNvPr id="215" name="pl215"/>
-            <p:cNvSpPr/>
-            <p:nvPr/>
-          </p:nvSpPr>
-          <p:spPr>
-            <a:xfrm>
-              <a:off x="1326279" y="4090341"/>
-              <a:ext cx="6943744" cy="970784"/>
+            <p:cNvPr id="214" name="pl214"/>
+            <p:cNvSpPr/>
+            <p:nvPr/>
+          </p:nvSpPr>
+          <p:spPr>
+            <a:xfrm>
+              <a:off x="1326279" y="4085397"/>
+              <a:ext cx="6943744" cy="983841"/>
             </a:xfrm>
             <a:custGeom>
               <a:avLst/>
               <a:pathLst>
-                <a:path w="6943744" h="970784">
+                <a:path w="6943744" h="983841">
                   <a:moveTo>
                     <a:pt x="6943744" y="0"/>
                   </a:moveTo>
                   <a:lnTo>
-                    <a:pt x="6855848" y="8759"/>
-                  </a:lnTo>
-                  <a:lnTo>
-                    <a:pt x="6767953" y="17526"/>
-                  </a:lnTo>
-                  <a:lnTo>
-                    <a:pt x="6680057" y="26301"/>
-                  </a:lnTo>
-                  <a:lnTo>
-                    <a:pt x="6592162" y="35084"/>
-                  </a:lnTo>
-                  <a:lnTo>
-                    <a:pt x="6504266" y="43875"/>
-                  </a:lnTo>
-                  <a:lnTo>
-                    <a:pt x="6416371" y="52675"/>
-                  </a:lnTo>
-                  <a:lnTo>
-                    <a:pt x="6328475" y="61485"/>
-                  </a:lnTo>
-                  <a:lnTo>
-                    <a:pt x="6240580" y="70305"/>
-                  </a:lnTo>
-                  <a:lnTo>
-                    <a:pt x="6152684" y="79136"/>
-                  </a:lnTo>
-                  <a:lnTo>
-                    <a:pt x="6064789" y="87979"/>
-                  </a:lnTo>
-                  <a:lnTo>
-                    <a:pt x="5976893" y="96835"/>
-                  </a:lnTo>
-                  <a:lnTo>
-                    <a:pt x="5888998" y="105703"/>
-                  </a:lnTo>
-                  <a:lnTo>
-                    <a:pt x="5801102" y="114586"/>
-                  </a:lnTo>
-                  <a:lnTo>
-                    <a:pt x="5713207" y="123485"/>
-                  </a:lnTo>
-                  <a:lnTo>
-                    <a:pt x="5625311" y="132400"/>
-                  </a:lnTo>
-                  <a:lnTo>
-                    <a:pt x="5537416" y="141333"/>
-                  </a:lnTo>
-                  <a:lnTo>
-                    <a:pt x="5449520" y="150285"/>
-                  </a:lnTo>
-                  <a:lnTo>
-                    <a:pt x="5361625" y="159258"/>
-                  </a:lnTo>
-                  <a:lnTo>
-                    <a:pt x="5273729" y="168254"/>
-                  </a:lnTo>
-                  <a:lnTo>
-                    <a:pt x="5185834" y="177274"/>
-                  </a:lnTo>
-                  <a:lnTo>
-                    <a:pt x="5097938" y="186320"/>
-                  </a:lnTo>
-                  <a:lnTo>
-                    <a:pt x="5010043" y="195396"/>
-                  </a:lnTo>
-                  <a:lnTo>
-                    <a:pt x="4922147" y="204503"/>
-                  </a:lnTo>
-                  <a:lnTo>
-                    <a:pt x="4834252" y="213644"/>
-                  </a:lnTo>
-                  <a:lnTo>
-                    <a:pt x="4746356" y="222823"/>
-                  </a:lnTo>
-                  <a:lnTo>
-                    <a:pt x="4658461" y="232043"/>
-                  </a:lnTo>
-                  <a:lnTo>
-                    <a:pt x="4570565" y="241309"/>
-                  </a:lnTo>
-                  <a:lnTo>
-                    <a:pt x="4482670" y="250624"/>
-                  </a:lnTo>
-                  <a:lnTo>
-                    <a:pt x="4394774" y="259995"/>
-                  </a:lnTo>
-                  <a:lnTo>
-                    <a:pt x="4306879" y="269426"/>
-                  </a:lnTo>
-                  <a:lnTo>
-                    <a:pt x="4218983" y="278925"/>
-                  </a:lnTo>
-                  <a:lnTo>
-                    <a:pt x="4131088" y="288499"/>
-                  </a:lnTo>
-                  <a:lnTo>
-                    <a:pt x="4043192" y="298156"/>
-                  </a:lnTo>
-                  <a:lnTo>
-                    <a:pt x="3955297" y="307905"/>
-                  </a:lnTo>
-                  <a:lnTo>
-                    <a:pt x="3867401" y="317757"/>
-                  </a:lnTo>
-                  <a:lnTo>
-                    <a:pt x="3779506" y="327724"/>
-                  </a:lnTo>
-                  <a:lnTo>
-                    <a:pt x="3691610" y="337818"/>
-                  </a:lnTo>
-                  <a:lnTo>
-                    <a:pt x="3603715" y="348056"/>
-                  </a:lnTo>
-                  <a:lnTo>
-                    <a:pt x="3515819" y="358453"/>
-                  </a:lnTo>
-                  <a:lnTo>
-                    <a:pt x="3427924" y="369027"/>
-                  </a:lnTo>
-                  <a:lnTo>
-                    <a:pt x="3340028" y="379798"/>
-                  </a:lnTo>
-                  <a:lnTo>
-                    <a:pt x="3252133" y="390786"/>
-                  </a:lnTo>
-                  <a:lnTo>
-                    <a:pt x="3164237" y="402012"/>
-                  </a:lnTo>
-                  <a:lnTo>
-                    <a:pt x="3076342" y="413500"/>
-                  </a:lnTo>
-                  <a:lnTo>
-                    <a:pt x="2988446" y="425271"/>
-                  </a:lnTo>
-                  <a:lnTo>
-                    <a:pt x="2900551" y="437346"/>
-                  </a:lnTo>
-                  <a:lnTo>
-                    <a:pt x="2812655" y="449743"/>
-                  </a:lnTo>
-                  <a:lnTo>
-                    <a:pt x="2724760" y="462478"/>
-                  </a:lnTo>
-                  <a:lnTo>
-                    <a:pt x="2636864" y="475561"/>
-                  </a:lnTo>
-                  <a:lnTo>
-                    <a:pt x="2548969" y="488999"/>
-                  </a:lnTo>
-                  <a:lnTo>
-                    <a:pt x="2461073" y="502791"/>
-                  </a:lnTo>
-                  <a:lnTo>
-                    <a:pt x="2373178" y="516932"/>
-                  </a:lnTo>
-                  <a:lnTo>
-                    <a:pt x="2285282" y="531413"/>
-                  </a:lnTo>
-                  <a:lnTo>
-                    <a:pt x="2197387" y="546218"/>
-                  </a:lnTo>
-                  <a:lnTo>
-                    <a:pt x="2109491" y="561329"/>
-                  </a:lnTo>
-                  <a:lnTo>
-                    <a:pt x="2021596" y="576725"/>
-                  </a:lnTo>
-                  <a:lnTo>
-                    <a:pt x="1933700" y="592385"/>
-                  </a:lnTo>
-                  <a:lnTo>
-                    <a:pt x="1845805" y="608287"/>
-                  </a:lnTo>
-                  <a:lnTo>
-                    <a:pt x="1757909" y="624408"/>
-                  </a:lnTo>
-                  <a:lnTo>
-                    <a:pt x="1670014" y="640728"/>
-                  </a:lnTo>
-                  <a:lnTo>
-                    <a:pt x="1582118" y="657228"/>
-                  </a:lnTo>
-                  <a:lnTo>
-                    <a:pt x="1494223" y="673889"/>
-                  </a:lnTo>
-                  <a:lnTo>
-                    <a:pt x="1406327" y="690694"/>
-                  </a:lnTo>
-                  <a:lnTo>
-                    <a:pt x="1318432" y="707629"/>
-                  </a:lnTo>
-                  <a:lnTo>
-                    <a:pt x="1230536" y="724680"/>
-                  </a:lnTo>
-                  <a:lnTo>
-                    <a:pt x="1142641" y="741836"/>
-                  </a:lnTo>
-                  <a:lnTo>
-                    <a:pt x="1054745" y="759085"/>
-                  </a:lnTo>
-                  <a:lnTo>
-                    <a:pt x="966850" y="776418"/>
-                  </a:lnTo>
-                  <a:lnTo>
-                    <a:pt x="878954" y="793827"/>
-                  </a:lnTo>
-                  <a:lnTo>
-                    <a:pt x="791059" y="811304"/>
-                  </a:lnTo>
-                  <a:lnTo>
-                    <a:pt x="703163" y="828843"/>
-                  </a:lnTo>
-                  <a:lnTo>
-                    <a:pt x="615268" y="846437"/>
-                  </a:lnTo>
-                  <a:lnTo>
-                    <a:pt x="527372" y="864082"/>
-                  </a:lnTo>
-                  <a:lnTo>
-                    <a:pt x="439477" y="881773"/>
-                  </a:lnTo>
-                  <a:lnTo>
-                    <a:pt x="351581" y="899505"/>
-                  </a:lnTo>
-                  <a:lnTo>
-                    <a:pt x="263686" y="917276"/>
-                  </a:lnTo>
-                  <a:lnTo>
-                    <a:pt x="175790" y="935081"/>
-                  </a:lnTo>
-                  <a:lnTo>
-                    <a:pt x="87895" y="952918"/>
-                  </a:lnTo>
-                  <a:lnTo>
-                    <a:pt x="0" y="970784"/>
+                    <a:pt x="6855848" y="8925"/>
+                  </a:lnTo>
+                  <a:lnTo>
+                    <a:pt x="6767953" y="17858"/>
+                  </a:lnTo>
+                  <a:lnTo>
+                    <a:pt x="6680057" y="26798"/>
+                  </a:lnTo>
+                  <a:lnTo>
+                    <a:pt x="6592162" y="35746"/>
+                  </a:lnTo>
+                  <a:lnTo>
+                    <a:pt x="6504266" y="44703"/>
+                  </a:lnTo>
+                  <a:lnTo>
+                    <a:pt x="6416371" y="53669"/>
+                  </a:lnTo>
+                  <a:lnTo>
+                    <a:pt x="6328475" y="62645"/>
+                  </a:lnTo>
+                  <a:lnTo>
+                    <a:pt x="6240580" y="71631"/>
+                  </a:lnTo>
+                  <a:lnTo>
+                    <a:pt x="6152684" y="80628"/>
+                  </a:lnTo>
+                  <a:lnTo>
+                    <a:pt x="6064789" y="89637"/>
+                  </a:lnTo>
+                  <a:lnTo>
+                    <a:pt x="5976893" y="98658"/>
+                  </a:lnTo>
+                  <a:lnTo>
+                    <a:pt x="5888998" y="107693"/>
+                  </a:lnTo>
+                  <a:lnTo>
+                    <a:pt x="5801102" y="116742"/>
+                  </a:lnTo>
+                  <a:lnTo>
+                    <a:pt x="5713207" y="125807"/>
+                  </a:lnTo>
+                  <a:lnTo>
+                    <a:pt x="5625311" y="134888"/>
+                  </a:lnTo>
+                  <a:lnTo>
+                    <a:pt x="5537416" y="143987"/>
+                  </a:lnTo>
+                  <a:lnTo>
+                    <a:pt x="5449520" y="153106"/>
+                  </a:lnTo>
+                  <a:lnTo>
+                    <a:pt x="5361625" y="162245"/>
+                  </a:lnTo>
+                  <a:lnTo>
+                    <a:pt x="5273729" y="171408"/>
+                  </a:lnTo>
+                  <a:lnTo>
+                    <a:pt x="5185834" y="180594"/>
+                  </a:lnTo>
+                  <a:lnTo>
+                    <a:pt x="5097938" y="189808"/>
+                  </a:lnTo>
+                  <a:lnTo>
+                    <a:pt x="5010043" y="199050"/>
+                  </a:lnTo>
+                  <a:lnTo>
+                    <a:pt x="4922147" y="208324"/>
+                  </a:lnTo>
+                  <a:lnTo>
+                    <a:pt x="4834252" y="217633"/>
+                  </a:lnTo>
+                  <a:lnTo>
+                    <a:pt x="4746356" y="226980"/>
+                  </a:lnTo>
+                  <a:lnTo>
+                    <a:pt x="4658461" y="236368"/>
+                  </a:lnTo>
+                  <a:lnTo>
+                    <a:pt x="4570565" y="245801"/>
+                  </a:lnTo>
+                  <a:lnTo>
+                    <a:pt x="4482670" y="255285"/>
+                  </a:lnTo>
+                  <a:lnTo>
+                    <a:pt x="4394774" y="264824"/>
+                  </a:lnTo>
+                  <a:lnTo>
+                    <a:pt x="4306879" y="274424"/>
+                  </a:lnTo>
+                  <a:lnTo>
+                    <a:pt x="4218983" y="284092"/>
+                  </a:lnTo>
+                  <a:lnTo>
+                    <a:pt x="4131088" y="293835"/>
+                  </a:lnTo>
+                  <a:lnTo>
+                    <a:pt x="4043192" y="303661"/>
+                  </a:lnTo>
+                  <a:lnTo>
+                    <a:pt x="3955297" y="313581"/>
+                  </a:lnTo>
+                  <a:lnTo>
+                    <a:pt x="3867401" y="323604"/>
+                  </a:lnTo>
+                  <a:lnTo>
+                    <a:pt x="3779506" y="333742"/>
+                  </a:lnTo>
+                  <a:lnTo>
+                    <a:pt x="3691610" y="344009"/>
+                  </a:lnTo>
+                  <a:lnTo>
+                    <a:pt x="3603715" y="354419"/>
+                  </a:lnTo>
+                  <a:lnTo>
+                    <a:pt x="3515819" y="364989"/>
+                  </a:lnTo>
+                  <a:lnTo>
+                    <a:pt x="3427924" y="375736"/>
+                  </a:lnTo>
+                  <a:lnTo>
+                    <a:pt x="3340028" y="386681"/>
+                  </a:lnTo>
+                  <a:lnTo>
+                    <a:pt x="3252133" y="397844"/>
+                  </a:lnTo>
+                  <a:lnTo>
+                    <a:pt x="3164237" y="409247"/>
+                  </a:lnTo>
+                  <a:lnTo>
+                    <a:pt x="3076342" y="420910"/>
+                  </a:lnTo>
+                  <a:lnTo>
+                    <a:pt x="2988446" y="432858"/>
+                  </a:lnTo>
+                  <a:lnTo>
+                    <a:pt x="2900551" y="445109"/>
+                  </a:lnTo>
+                  <a:lnTo>
+                    <a:pt x="2812655" y="457683"/>
+                  </a:lnTo>
+                  <a:lnTo>
+                    <a:pt x="2724760" y="470593"/>
+                  </a:lnTo>
+                  <a:lnTo>
+                    <a:pt x="2636864" y="483852"/>
+                  </a:lnTo>
+                  <a:lnTo>
+                    <a:pt x="2548969" y="497464"/>
+                  </a:lnTo>
+                  <a:lnTo>
+                    <a:pt x="2461073" y="511429"/>
+                  </a:lnTo>
+                  <a:lnTo>
+                    <a:pt x="2373178" y="525742"/>
+                  </a:lnTo>
+                  <a:lnTo>
+                    <a:pt x="2285282" y="540393"/>
+                  </a:lnTo>
+                  <a:lnTo>
+                    <a:pt x="2197387" y="555367"/>
+                  </a:lnTo>
+                  <a:lnTo>
+                    <a:pt x="2109491" y="570645"/>
+                  </a:lnTo>
+                  <a:lnTo>
+                    <a:pt x="2021596" y="586207"/>
+                  </a:lnTo>
+                  <a:lnTo>
+                    <a:pt x="1933700" y="602031"/>
+                  </a:lnTo>
+                  <a:lnTo>
+                    <a:pt x="1845805" y="618095"/>
+                  </a:lnTo>
+                  <a:lnTo>
+                    <a:pt x="1757909" y="634377"/>
+                  </a:lnTo>
+                  <a:lnTo>
+                    <a:pt x="1670014" y="650857"/>
+                  </a:lnTo>
+                  <a:lnTo>
+                    <a:pt x="1582118" y="667515"/>
+                  </a:lnTo>
+                  <a:lnTo>
+                    <a:pt x="1494223" y="684334"/>
+                  </a:lnTo>
+                  <a:lnTo>
+                    <a:pt x="1406327" y="701296"/>
+                  </a:lnTo>
+                  <a:lnTo>
+                    <a:pt x="1318432" y="718387"/>
+                  </a:lnTo>
+                  <a:lnTo>
+                    <a:pt x="1230536" y="735594"/>
+                  </a:lnTo>
+                  <a:lnTo>
+                    <a:pt x="1142641" y="752905"/>
+                  </a:lnTo>
+                  <a:lnTo>
+                    <a:pt x="1054745" y="770308"/>
+                  </a:lnTo>
+                  <a:lnTo>
+                    <a:pt x="966850" y="787796"/>
+                  </a:lnTo>
+                  <a:lnTo>
+                    <a:pt x="878954" y="805358"/>
+                  </a:lnTo>
+                  <a:lnTo>
+                    <a:pt x="791059" y="822989"/>
+                  </a:lnTo>
+                  <a:lnTo>
+                    <a:pt x="703163" y="840681"/>
+                  </a:lnTo>
+                  <a:lnTo>
+                    <a:pt x="615268" y="858428"/>
+                  </a:lnTo>
+                  <a:lnTo>
+                    <a:pt x="527372" y="876226"/>
+                  </a:lnTo>
+                  <a:lnTo>
+                    <a:pt x="439477" y="894069"/>
+                  </a:lnTo>
+                  <a:lnTo>
+                    <a:pt x="351581" y="911954"/>
+                  </a:lnTo>
+                  <a:lnTo>
+                    <a:pt x="263686" y="929877"/>
+                  </a:lnTo>
+                  <a:lnTo>
+                    <a:pt x="175790" y="947834"/>
+                  </a:lnTo>
+                  <a:lnTo>
+                    <a:pt x="87895" y="965823"/>
+                  </a:lnTo>
+                  <a:lnTo>
+                    <a:pt x="0" y="983841"/>
                   </a:lnTo>
                 </a:path>
               </a:pathLst>
@@ -10773,255 +10738,255 @@
         </p:sp>
         <p:sp>
           <p:nvSpPr>
-            <p:cNvPr id="216" name="pl216"/>
-            <p:cNvSpPr/>
-            <p:nvPr/>
-          </p:nvSpPr>
-          <p:spPr>
-            <a:xfrm>
-              <a:off x="1326279" y="3839499"/>
-              <a:ext cx="6943744" cy="1063180"/>
+            <p:cNvPr id="215" name="pl215"/>
+            <p:cNvSpPr/>
+            <p:nvPr/>
+          </p:nvSpPr>
+          <p:spPr>
+            <a:xfrm>
+              <a:off x="1326279" y="3835094"/>
+              <a:ext cx="6943744" cy="1075674"/>
             </a:xfrm>
             <a:custGeom>
               <a:avLst/>
               <a:pathLst>
-                <a:path w="6943744" h="1063180">
+                <a:path w="6943744" h="1075674">
                   <a:moveTo>
-                    <a:pt x="0" y="1063180"/>
+                    <a:pt x="0" y="1075674"/>
                   </a:moveTo>
                   <a:lnTo>
-                    <a:pt x="87895" y="1049722"/>
-                  </a:lnTo>
-                  <a:lnTo>
-                    <a:pt x="175790" y="1036264"/>
-                  </a:lnTo>
-                  <a:lnTo>
-                    <a:pt x="263686" y="1022806"/>
-                  </a:lnTo>
-                  <a:lnTo>
-                    <a:pt x="351581" y="1009348"/>
-                  </a:lnTo>
-                  <a:lnTo>
-                    <a:pt x="439477" y="995890"/>
-                  </a:lnTo>
-                  <a:lnTo>
-                    <a:pt x="527372" y="982432"/>
-                  </a:lnTo>
-                  <a:lnTo>
-                    <a:pt x="615268" y="968974"/>
-                  </a:lnTo>
-                  <a:lnTo>
-                    <a:pt x="703163" y="955516"/>
-                  </a:lnTo>
-                  <a:lnTo>
-                    <a:pt x="791059" y="942059"/>
-                  </a:lnTo>
-                  <a:lnTo>
-                    <a:pt x="878954" y="928601"/>
-                  </a:lnTo>
-                  <a:lnTo>
-                    <a:pt x="966850" y="915143"/>
-                  </a:lnTo>
-                  <a:lnTo>
-                    <a:pt x="1054745" y="901685"/>
-                  </a:lnTo>
-                  <a:lnTo>
-                    <a:pt x="1142641" y="888227"/>
-                  </a:lnTo>
-                  <a:lnTo>
-                    <a:pt x="1230536" y="874769"/>
-                  </a:lnTo>
-                  <a:lnTo>
-                    <a:pt x="1318432" y="861311"/>
-                  </a:lnTo>
-                  <a:lnTo>
-                    <a:pt x="1406327" y="847853"/>
-                  </a:lnTo>
-                  <a:lnTo>
-                    <a:pt x="1494223" y="834395"/>
-                  </a:lnTo>
-                  <a:lnTo>
-                    <a:pt x="1582118" y="820937"/>
-                  </a:lnTo>
-                  <a:lnTo>
-                    <a:pt x="1670014" y="807479"/>
-                  </a:lnTo>
-                  <a:lnTo>
-                    <a:pt x="1757909" y="794021"/>
-                  </a:lnTo>
-                  <a:lnTo>
-                    <a:pt x="1845805" y="780563"/>
-                  </a:lnTo>
-                  <a:lnTo>
-                    <a:pt x="1933700" y="767105"/>
-                  </a:lnTo>
-                  <a:lnTo>
-                    <a:pt x="2021596" y="753647"/>
-                  </a:lnTo>
-                  <a:lnTo>
-                    <a:pt x="2109491" y="740189"/>
-                  </a:lnTo>
-                  <a:lnTo>
-                    <a:pt x="2197387" y="726731"/>
-                  </a:lnTo>
-                  <a:lnTo>
-                    <a:pt x="2285282" y="713273"/>
-                  </a:lnTo>
-                  <a:lnTo>
-                    <a:pt x="2373178" y="699815"/>
-                  </a:lnTo>
-                  <a:lnTo>
-                    <a:pt x="2461073" y="686357"/>
-                  </a:lnTo>
-                  <a:lnTo>
-                    <a:pt x="2548969" y="672899"/>
-                  </a:lnTo>
-                  <a:lnTo>
-                    <a:pt x="2636864" y="659441"/>
-                  </a:lnTo>
-                  <a:lnTo>
-                    <a:pt x="2724760" y="645983"/>
-                  </a:lnTo>
-                  <a:lnTo>
-                    <a:pt x="2812655" y="632525"/>
-                  </a:lnTo>
-                  <a:lnTo>
-                    <a:pt x="2900551" y="619067"/>
-                  </a:lnTo>
-                  <a:lnTo>
-                    <a:pt x="2988446" y="605609"/>
-                  </a:lnTo>
-                  <a:lnTo>
-                    <a:pt x="3076342" y="592151"/>
-                  </a:lnTo>
-                  <a:lnTo>
-                    <a:pt x="3164237" y="578693"/>
-                  </a:lnTo>
-                  <a:lnTo>
-                    <a:pt x="3252133" y="565235"/>
-                  </a:lnTo>
-                  <a:lnTo>
-                    <a:pt x="3340028" y="551777"/>
-                  </a:lnTo>
-                  <a:lnTo>
-                    <a:pt x="3427924" y="538319"/>
-                  </a:lnTo>
-                  <a:lnTo>
-                    <a:pt x="3515819" y="524861"/>
-                  </a:lnTo>
-                  <a:lnTo>
-                    <a:pt x="3603715" y="511403"/>
-                  </a:lnTo>
-                  <a:lnTo>
-                    <a:pt x="3691610" y="497945"/>
-                  </a:lnTo>
-                  <a:lnTo>
-                    <a:pt x="3779506" y="484487"/>
-                  </a:lnTo>
-                  <a:lnTo>
-                    <a:pt x="3867401" y="471029"/>
-                  </a:lnTo>
-                  <a:lnTo>
-                    <a:pt x="3955297" y="457571"/>
-                  </a:lnTo>
-                  <a:lnTo>
-                    <a:pt x="4043192" y="444113"/>
-                  </a:lnTo>
-                  <a:lnTo>
-                    <a:pt x="4131088" y="430655"/>
-                  </a:lnTo>
-                  <a:lnTo>
-                    <a:pt x="4218983" y="417197"/>
-                  </a:lnTo>
-                  <a:lnTo>
-                    <a:pt x="4306879" y="403739"/>
-                  </a:lnTo>
-                  <a:lnTo>
-                    <a:pt x="4394774" y="390281"/>
-                  </a:lnTo>
-                  <a:lnTo>
-                    <a:pt x="4482670" y="376823"/>
-                  </a:lnTo>
-                  <a:lnTo>
-                    <a:pt x="4570565" y="363365"/>
-                  </a:lnTo>
-                  <a:lnTo>
-                    <a:pt x="4658461" y="349907"/>
-                  </a:lnTo>
-                  <a:lnTo>
-                    <a:pt x="4746356" y="336449"/>
-                  </a:lnTo>
-                  <a:lnTo>
-                    <a:pt x="4834252" y="322991"/>
-                  </a:lnTo>
-                  <a:lnTo>
-                    <a:pt x="4922147" y="309533"/>
-                  </a:lnTo>
-                  <a:lnTo>
-                    <a:pt x="5010043" y="296075"/>
-                  </a:lnTo>
-                  <a:lnTo>
-                    <a:pt x="5097938" y="282617"/>
-                  </a:lnTo>
-                  <a:lnTo>
-                    <a:pt x="5185834" y="269159"/>
-                  </a:lnTo>
-                  <a:lnTo>
-                    <a:pt x="5273729" y="255701"/>
-                  </a:lnTo>
-                  <a:lnTo>
-                    <a:pt x="5361625" y="242243"/>
-                  </a:lnTo>
-                  <a:lnTo>
-                    <a:pt x="5449520" y="228785"/>
-                  </a:lnTo>
-                  <a:lnTo>
-                    <a:pt x="5537416" y="215327"/>
-                  </a:lnTo>
-                  <a:lnTo>
-                    <a:pt x="5625311" y="201869"/>
-                  </a:lnTo>
-                  <a:lnTo>
-                    <a:pt x="5713207" y="188411"/>
-                  </a:lnTo>
-                  <a:lnTo>
-                    <a:pt x="5801102" y="174953"/>
-                  </a:lnTo>
-                  <a:lnTo>
-                    <a:pt x="5888998" y="161495"/>
-                  </a:lnTo>
-                  <a:lnTo>
-                    <a:pt x="5976893" y="148037"/>
-                  </a:lnTo>
-                  <a:lnTo>
-                    <a:pt x="6064789" y="134579"/>
-                  </a:lnTo>
-                  <a:lnTo>
-                    <a:pt x="6152684" y="121121"/>
-                  </a:lnTo>
-                  <a:lnTo>
-                    <a:pt x="6240580" y="107663"/>
-                  </a:lnTo>
-                  <a:lnTo>
-                    <a:pt x="6328475" y="94205"/>
-                  </a:lnTo>
-                  <a:lnTo>
-                    <a:pt x="6416371" y="80747"/>
-                  </a:lnTo>
-                  <a:lnTo>
-                    <a:pt x="6504266" y="67289"/>
-                  </a:lnTo>
-                  <a:lnTo>
-                    <a:pt x="6592162" y="53831"/>
-                  </a:lnTo>
-                  <a:lnTo>
-                    <a:pt x="6680057" y="40373"/>
-                  </a:lnTo>
-                  <a:lnTo>
-                    <a:pt x="6767953" y="26915"/>
-                  </a:lnTo>
-                  <a:lnTo>
-                    <a:pt x="6855848" y="13457"/>
+                    <a:pt x="87895" y="1062057"/>
+                  </a:lnTo>
+                  <a:lnTo>
+                    <a:pt x="175790" y="1048441"/>
+                  </a:lnTo>
+                  <a:lnTo>
+                    <a:pt x="263686" y="1034825"/>
+                  </a:lnTo>
+                  <a:lnTo>
+                    <a:pt x="351581" y="1021209"/>
+                  </a:lnTo>
+                  <a:lnTo>
+                    <a:pt x="439477" y="1007593"/>
+                  </a:lnTo>
+                  <a:lnTo>
+                    <a:pt x="527372" y="993977"/>
+                  </a:lnTo>
+                  <a:lnTo>
+                    <a:pt x="615268" y="980361"/>
+                  </a:lnTo>
+                  <a:lnTo>
+                    <a:pt x="703163" y="966745"/>
+                  </a:lnTo>
+                  <a:lnTo>
+                    <a:pt x="791059" y="953128"/>
+                  </a:lnTo>
+                  <a:lnTo>
+                    <a:pt x="878954" y="939512"/>
+                  </a:lnTo>
+                  <a:lnTo>
+                    <a:pt x="966850" y="925896"/>
+                  </a:lnTo>
+                  <a:lnTo>
+                    <a:pt x="1054745" y="912280"/>
+                  </a:lnTo>
+                  <a:lnTo>
+                    <a:pt x="1142641" y="898664"/>
+                  </a:lnTo>
+                  <a:lnTo>
+                    <a:pt x="1230536" y="885048"/>
+                  </a:lnTo>
+                  <a:lnTo>
+                    <a:pt x="1318432" y="871432"/>
+                  </a:lnTo>
+                  <a:lnTo>
+                    <a:pt x="1406327" y="857816"/>
+                  </a:lnTo>
+                  <a:lnTo>
+                    <a:pt x="1494223" y="844199"/>
+                  </a:lnTo>
+                  <a:lnTo>
+                    <a:pt x="1582118" y="830583"/>
+                  </a:lnTo>
+                  <a:lnTo>
+                    <a:pt x="1670014" y="816967"/>
+                  </a:lnTo>
+                  <a:lnTo>
+                    <a:pt x="1757909" y="803351"/>
+                  </a:lnTo>
+                  <a:lnTo>
+                    <a:pt x="1845805" y="789735"/>
+                  </a:lnTo>
+                  <a:lnTo>
+                    <a:pt x="1933700" y="776119"/>
+                  </a:lnTo>
+                  <a:lnTo>
+                    <a:pt x="2021596" y="762503"/>
+                  </a:lnTo>
+                  <a:lnTo>
+                    <a:pt x="2109491" y="748887"/>
+                  </a:lnTo>
+                  <a:lnTo>
+                    <a:pt x="2197387" y="735270"/>
+                  </a:lnTo>
+                  <a:lnTo>
+                    <a:pt x="2285282" y="721654"/>
+                  </a:lnTo>
+                  <a:lnTo>
+                    <a:pt x="2373178" y="708038"/>
+                  </a:lnTo>
+                  <a:lnTo>
+                    <a:pt x="2461073" y="694422"/>
+                  </a:lnTo>
+                  <a:lnTo>
+                    <a:pt x="2548969" y="680806"/>
+                  </a:lnTo>
+                  <a:lnTo>
+                    <a:pt x="2636864" y="667190"/>
+                  </a:lnTo>
+                  <a:lnTo>
+                    <a:pt x="2724760" y="653574"/>
+                  </a:lnTo>
+                  <a:lnTo>
+                    <a:pt x="2812655" y="639957"/>
+                  </a:lnTo>
+                  <a:lnTo>
+                    <a:pt x="2900551" y="626341"/>
+                  </a:lnTo>
+                  <a:lnTo>
+                    <a:pt x="2988446" y="612725"/>
+                  </a:lnTo>
+                  <a:lnTo>
+                    <a:pt x="3076342" y="599109"/>
+                  </a:lnTo>
+                  <a:lnTo>
+                    <a:pt x="3164237" y="585493"/>
+                  </a:lnTo>
+                  <a:lnTo>
+                    <a:pt x="3252133" y="571877"/>
+                  </a:lnTo>
+                  <a:lnTo>
+                    <a:pt x="3340028" y="558261"/>
+                  </a:lnTo>
+                  <a:lnTo>
+                    <a:pt x="3427924" y="544645"/>
+                  </a:lnTo>
+                  <a:lnTo>
+                    <a:pt x="3515819" y="531028"/>
+                  </a:lnTo>
+                  <a:lnTo>
+                    <a:pt x="3603715" y="517412"/>
+                  </a:lnTo>
+                  <a:lnTo>
+                    <a:pt x="3691610" y="503796"/>
+                  </a:lnTo>
+                  <a:lnTo>
+                    <a:pt x="3779506" y="490180"/>
+                  </a:lnTo>
+                  <a:lnTo>
+                    <a:pt x="3867401" y="476564"/>
+                  </a:lnTo>
+                  <a:lnTo>
+                    <a:pt x="3955297" y="462948"/>
+                  </a:lnTo>
+                  <a:lnTo>
+                    <a:pt x="4043192" y="449332"/>
+                  </a:lnTo>
+                  <a:lnTo>
+                    <a:pt x="4131088" y="435716"/>
+                  </a:lnTo>
+                  <a:lnTo>
+                    <a:pt x="4218983" y="422099"/>
+                  </a:lnTo>
+                  <a:lnTo>
+                    <a:pt x="4306879" y="408483"/>
+                  </a:lnTo>
+                  <a:lnTo>
+                    <a:pt x="4394774" y="394867"/>
+                  </a:lnTo>
+                  <a:lnTo>
+                    <a:pt x="4482670" y="381251"/>
+                  </a:lnTo>
+                  <a:lnTo>
+                    <a:pt x="4570565" y="367635"/>
+                  </a:lnTo>
+                  <a:lnTo>
+                    <a:pt x="4658461" y="354019"/>
+                  </a:lnTo>
+                  <a:lnTo>
+                    <a:pt x="4746356" y="340403"/>
+                  </a:lnTo>
+                  <a:lnTo>
+                    <a:pt x="4834252" y="326787"/>
+                  </a:lnTo>
+                  <a:lnTo>
+                    <a:pt x="4922147" y="313170"/>
+                  </a:lnTo>
+                  <a:lnTo>
+                    <a:pt x="5010043" y="299554"/>
+                  </a:lnTo>
+                  <a:lnTo>
+                    <a:pt x="5097938" y="285938"/>
+                  </a:lnTo>
+                  <a:lnTo>
+                    <a:pt x="5185834" y="272322"/>
+                  </a:lnTo>
+                  <a:lnTo>
+                    <a:pt x="5273729" y="258706"/>
+                  </a:lnTo>
+                  <a:lnTo>
+                    <a:pt x="5361625" y="245090"/>
+                  </a:lnTo>
+                  <a:lnTo>
+                    <a:pt x="5449520" y="231474"/>
+                  </a:lnTo>
+                  <a:lnTo>
+                    <a:pt x="5537416" y="217858"/>
+                  </a:lnTo>
+                  <a:lnTo>
+                    <a:pt x="5625311" y="204241"/>
+                  </a:lnTo>
+                  <a:lnTo>
+                    <a:pt x="5713207" y="190625"/>
+                  </a:lnTo>
+                  <a:lnTo>
+                    <a:pt x="5801102" y="177009"/>
+                  </a:lnTo>
+                  <a:lnTo>
+                    <a:pt x="5888998" y="163393"/>
+                  </a:lnTo>
+                  <a:lnTo>
+                    <a:pt x="5976893" y="149777"/>
+                  </a:lnTo>
+                  <a:lnTo>
+                    <a:pt x="6064789" y="136161"/>
+                  </a:lnTo>
+                  <a:lnTo>
+                    <a:pt x="6152684" y="122545"/>
+                  </a:lnTo>
+                  <a:lnTo>
+                    <a:pt x="6240580" y="108929"/>
+                  </a:lnTo>
+                  <a:lnTo>
+                    <a:pt x="6328475" y="95312"/>
+                  </a:lnTo>
+                  <a:lnTo>
+                    <a:pt x="6416371" y="81696"/>
+                  </a:lnTo>
+                  <a:lnTo>
+                    <a:pt x="6504266" y="68080"/>
+                  </a:lnTo>
+                  <a:lnTo>
+                    <a:pt x="6592162" y="54464"/>
+                  </a:lnTo>
+                  <a:lnTo>
+                    <a:pt x="6680057" y="40848"/>
+                  </a:lnTo>
+                  <a:lnTo>
+                    <a:pt x="6767953" y="27232"/>
+                  </a:lnTo>
+                  <a:lnTo>
+                    <a:pt x="6855848" y="13616"/>
                   </a:lnTo>
                   <a:lnTo>
                     <a:pt x="6943744" y="0"/>
@@ -11047,7 +11012,7 @@
         </p:sp>
         <p:sp>
           <p:nvSpPr>
-            <p:cNvPr id="217" name="tx217"/>
+            <p:cNvPr id="216" name="tx216"/>
             <p:cNvSpPr/>
             <p:nvPr/>
           </p:nvSpPr>
@@ -11093,7 +11058,7 @@
         </p:sp>
         <p:sp>
           <p:nvSpPr>
-            <p:cNvPr id="218" name="tx218"/>
+            <p:cNvPr id="217" name="tx217"/>
             <p:cNvSpPr/>
             <p:nvPr/>
           </p:nvSpPr>
@@ -11139,7 +11104,7 @@
         </p:sp>
         <p:sp>
           <p:nvSpPr>
-            <p:cNvPr id="219" name="tx219"/>
+            <p:cNvPr id="218" name="tx218"/>
             <p:cNvSpPr/>
             <p:nvPr/>
           </p:nvSpPr>
@@ -11185,7 +11150,7 @@
         </p:sp>
         <p:sp>
           <p:nvSpPr>
-            <p:cNvPr id="220" name="tx220"/>
+            <p:cNvPr id="219" name="tx219"/>
             <p:cNvSpPr/>
             <p:nvPr/>
           </p:nvSpPr>
@@ -11231,7 +11196,7 @@
         </p:sp>
         <p:sp>
           <p:nvSpPr>
-            <p:cNvPr id="221" name="tx221"/>
+            <p:cNvPr id="220" name="tx220"/>
             <p:cNvSpPr/>
             <p:nvPr/>
           </p:nvSpPr>
@@ -11277,7 +11242,7 @@
         </p:sp>
         <p:sp>
           <p:nvSpPr>
-            <p:cNvPr id="222" name="tx222"/>
+            <p:cNvPr id="221" name="tx221"/>
             <p:cNvSpPr/>
             <p:nvPr/>
           </p:nvSpPr>
@@ -11323,7 +11288,7 @@
         </p:sp>
         <p:sp>
           <p:nvSpPr>
-            <p:cNvPr id="223" name="tx223"/>
+            <p:cNvPr id="222" name="tx222"/>
             <p:cNvSpPr/>
             <p:nvPr/>
           </p:nvSpPr>
@@ -11369,7 +11334,7 @@
         </p:sp>
         <p:sp>
           <p:nvSpPr>
-            <p:cNvPr id="224" name="tx224"/>
+            <p:cNvPr id="223" name="tx223"/>
             <p:cNvSpPr/>
             <p:nvPr/>
           </p:nvSpPr>
@@ -11415,7 +11380,7 @@
         </p:sp>
         <p:sp>
           <p:nvSpPr>
-            <p:cNvPr id="225" name="tx225"/>
+            <p:cNvPr id="224" name="tx224"/>
             <p:cNvSpPr/>
             <p:nvPr/>
           </p:nvSpPr>
@@ -11461,7 +11426,7 @@
         </p:sp>
         <p:sp>
           <p:nvSpPr>
-            <p:cNvPr id="226" name="tx226"/>
+            <p:cNvPr id="225" name="tx225"/>
             <p:cNvSpPr/>
             <p:nvPr/>
           </p:nvSpPr>
@@ -11507,7 +11472,7 @@
         </p:sp>
         <p:sp>
           <p:nvSpPr>
-            <p:cNvPr id="227" name="tx227"/>
+            <p:cNvPr id="226" name="tx226"/>
             <p:cNvSpPr/>
             <p:nvPr/>
           </p:nvSpPr>
@@ -11553,7 +11518,7 @@
         </p:sp>
         <p:sp>
           <p:nvSpPr>
-            <p:cNvPr id="228" name="tx228"/>
+            <p:cNvPr id="227" name="tx227"/>
             <p:cNvSpPr/>
             <p:nvPr/>
           </p:nvSpPr>
